--- a/assets/files/animasi-proses-bisnis.pptx
+++ b/assets/files/animasi-proses-bisnis.pptx
@@ -129,7 +129,7 @@
           <p:cNvPr id="2" name="Title 1">
             <a:extLst>
               <a:ext uri="{FF2B5EF4-FFF2-40B4-BE49-F238E27FC236}">
-                <a16:creationId xmlns:a16="http://schemas.microsoft.com/office/drawing/2014/main" id="{06C62895-15EB-F143-C232-2C9925E45BBC}"/>
+                <a16:creationId xmlns:a16="http://schemas.microsoft.com/office/drawing/2014/main" id="{6C1E453A-7DA0-2FE2-6D57-E5351554C0BF}"/>
               </a:ext>
             </a:extLst>
           </p:cNvPr>
@@ -167,7 +167,7 @@
           <p:cNvPr id="3" name="Subtitle 2">
             <a:extLst>
               <a:ext uri="{FF2B5EF4-FFF2-40B4-BE49-F238E27FC236}">
-                <a16:creationId xmlns:a16="http://schemas.microsoft.com/office/drawing/2014/main" id="{572B0F2E-06BA-191E-59F9-5125558D720E}"/>
+                <a16:creationId xmlns:a16="http://schemas.microsoft.com/office/drawing/2014/main" id="{8B6850A7-C252-317A-A36E-37F54EDD491E}"/>
               </a:ext>
             </a:extLst>
           </p:cNvPr>
@@ -238,7 +238,7 @@
           <p:cNvPr id="4" name="Date Placeholder 3">
             <a:extLst>
               <a:ext uri="{FF2B5EF4-FFF2-40B4-BE49-F238E27FC236}">
-                <a16:creationId xmlns:a16="http://schemas.microsoft.com/office/drawing/2014/main" id="{B4DDA0D2-683F-059C-A1C8-AC04981A1AAA}"/>
+                <a16:creationId xmlns:a16="http://schemas.microsoft.com/office/drawing/2014/main" id="{883B97CE-6024-2819-7787-B7152E8D966E}"/>
               </a:ext>
             </a:extLst>
           </p:cNvPr>
@@ -254,9 +254,9 @@
           <a:bodyPr/>
           <a:lstStyle/>
           <a:p>
-            <a:fld id="{D7BF77C4-1D67-4110-AA8D-11E51ED4D64C}" type="datetimeFigureOut">
+            <a:fld id="{E41E57C9-2898-4A86-BD65-A6AADA69DC43}" type="datetimeFigureOut">
               <a:rPr lang="id-ID" smtClean="0"/>
-              <a:t>26/06/2026</a:t>
+              <a:t>27/06/2026</a:t>
             </a:fld>
             <a:endParaRPr lang="id-ID"/>
           </a:p>
@@ -267,7 +267,7 @@
           <p:cNvPr id="5" name="Footer Placeholder 4">
             <a:extLst>
               <a:ext uri="{FF2B5EF4-FFF2-40B4-BE49-F238E27FC236}">
-                <a16:creationId xmlns:a16="http://schemas.microsoft.com/office/drawing/2014/main" id="{D035F8E2-A63E-0A01-E0AA-3E5DD09F448E}"/>
+                <a16:creationId xmlns:a16="http://schemas.microsoft.com/office/drawing/2014/main" id="{5F3B2D84-A5FE-9183-0D97-CAFB5E3B0325}"/>
               </a:ext>
             </a:extLst>
           </p:cNvPr>
@@ -292,7 +292,7 @@
           <p:cNvPr id="6" name="Slide Number Placeholder 5">
             <a:extLst>
               <a:ext uri="{FF2B5EF4-FFF2-40B4-BE49-F238E27FC236}">
-                <a16:creationId xmlns:a16="http://schemas.microsoft.com/office/drawing/2014/main" id="{C957651F-158D-6EA1-407C-C4402E9321EC}"/>
+                <a16:creationId xmlns:a16="http://schemas.microsoft.com/office/drawing/2014/main" id="{94B35B46-0665-2DCD-1193-4834A112DBE9}"/>
               </a:ext>
             </a:extLst>
           </p:cNvPr>
@@ -308,7 +308,7 @@
           <a:bodyPr/>
           <a:lstStyle/>
           <a:p>
-            <a:fld id="{E7818D08-E1D4-4ED2-B1A5-3F9D52E030B6}" type="slidenum">
+            <a:fld id="{F08BCEDC-FE0E-414F-8D37-A32F8FC22AC3}" type="slidenum">
               <a:rPr lang="id-ID" smtClean="0"/>
               <a:t>‹#›</a:t>
             </a:fld>
@@ -319,7 +319,7 @@
     </p:spTree>
     <p:extLst>
       <p:ext uri="{BB962C8B-B14F-4D97-AF65-F5344CB8AC3E}">
-        <p14:creationId xmlns:p14="http://schemas.microsoft.com/office/powerpoint/2010/main" val="1812885322"/>
+        <p14:creationId xmlns:p14="http://schemas.microsoft.com/office/powerpoint/2010/main" val="3074020544"/>
       </p:ext>
     </p:extLst>
   </p:cSld>
@@ -351,7 +351,7 @@
           <p:cNvPr id="2" name="Title 1">
             <a:extLst>
               <a:ext uri="{FF2B5EF4-FFF2-40B4-BE49-F238E27FC236}">
-                <a16:creationId xmlns:a16="http://schemas.microsoft.com/office/drawing/2014/main" id="{878FFCFD-442D-2066-707F-1F4B4FABC121}"/>
+                <a16:creationId xmlns:a16="http://schemas.microsoft.com/office/drawing/2014/main" id="{5AC2DF01-EB22-CABA-3B3C-7956F762344C}"/>
               </a:ext>
             </a:extLst>
           </p:cNvPr>
@@ -380,7 +380,7 @@
           <p:cNvPr id="3" name="Vertical Text Placeholder 2">
             <a:extLst>
               <a:ext uri="{FF2B5EF4-FFF2-40B4-BE49-F238E27FC236}">
-                <a16:creationId xmlns:a16="http://schemas.microsoft.com/office/drawing/2014/main" id="{2BE5CDB9-2F69-2945-E7B8-54A91998FB49}"/>
+                <a16:creationId xmlns:a16="http://schemas.microsoft.com/office/drawing/2014/main" id="{3B247CD6-7464-47CF-77C7-7DE943D35D2F}"/>
               </a:ext>
             </a:extLst>
           </p:cNvPr>
@@ -438,7 +438,7 @@
           <p:cNvPr id="4" name="Date Placeholder 3">
             <a:extLst>
               <a:ext uri="{FF2B5EF4-FFF2-40B4-BE49-F238E27FC236}">
-                <a16:creationId xmlns:a16="http://schemas.microsoft.com/office/drawing/2014/main" id="{B853F43A-8CE6-6B20-C74C-5F3948345BE3}"/>
+                <a16:creationId xmlns:a16="http://schemas.microsoft.com/office/drawing/2014/main" id="{EC480206-88E0-98C2-4569-DA73312CB6CE}"/>
               </a:ext>
             </a:extLst>
           </p:cNvPr>
@@ -454,9 +454,9 @@
           <a:bodyPr/>
           <a:lstStyle/>
           <a:p>
-            <a:fld id="{D7BF77C4-1D67-4110-AA8D-11E51ED4D64C}" type="datetimeFigureOut">
+            <a:fld id="{E41E57C9-2898-4A86-BD65-A6AADA69DC43}" type="datetimeFigureOut">
               <a:rPr lang="id-ID" smtClean="0"/>
-              <a:t>26/06/2026</a:t>
+              <a:t>27/06/2026</a:t>
             </a:fld>
             <a:endParaRPr lang="id-ID"/>
           </a:p>
@@ -467,7 +467,7 @@
           <p:cNvPr id="5" name="Footer Placeholder 4">
             <a:extLst>
               <a:ext uri="{FF2B5EF4-FFF2-40B4-BE49-F238E27FC236}">
-                <a16:creationId xmlns:a16="http://schemas.microsoft.com/office/drawing/2014/main" id="{24718D85-6294-D536-381A-7A60FB435DB1}"/>
+                <a16:creationId xmlns:a16="http://schemas.microsoft.com/office/drawing/2014/main" id="{328ED72A-D3BA-4CDA-4B01-ABD12FE7B029}"/>
               </a:ext>
             </a:extLst>
           </p:cNvPr>
@@ -492,7 +492,7 @@
           <p:cNvPr id="6" name="Slide Number Placeholder 5">
             <a:extLst>
               <a:ext uri="{FF2B5EF4-FFF2-40B4-BE49-F238E27FC236}">
-                <a16:creationId xmlns:a16="http://schemas.microsoft.com/office/drawing/2014/main" id="{D445F870-881A-0BC3-B970-673729592569}"/>
+                <a16:creationId xmlns:a16="http://schemas.microsoft.com/office/drawing/2014/main" id="{B31C3006-50E4-00B5-72B2-1242BB7DFCEB}"/>
               </a:ext>
             </a:extLst>
           </p:cNvPr>
@@ -508,7 +508,7 @@
           <a:bodyPr/>
           <a:lstStyle/>
           <a:p>
-            <a:fld id="{E7818D08-E1D4-4ED2-B1A5-3F9D52E030B6}" type="slidenum">
+            <a:fld id="{F08BCEDC-FE0E-414F-8D37-A32F8FC22AC3}" type="slidenum">
               <a:rPr lang="id-ID" smtClean="0"/>
               <a:t>‹#›</a:t>
             </a:fld>
@@ -519,7 +519,7 @@
     </p:spTree>
     <p:extLst>
       <p:ext uri="{BB962C8B-B14F-4D97-AF65-F5344CB8AC3E}">
-        <p14:creationId xmlns:p14="http://schemas.microsoft.com/office/powerpoint/2010/main" val="809903014"/>
+        <p14:creationId xmlns:p14="http://schemas.microsoft.com/office/powerpoint/2010/main" val="3523456927"/>
       </p:ext>
     </p:extLst>
   </p:cSld>
@@ -551,7 +551,7 @@
           <p:cNvPr id="2" name="Vertical Title 1">
             <a:extLst>
               <a:ext uri="{FF2B5EF4-FFF2-40B4-BE49-F238E27FC236}">
-                <a16:creationId xmlns:a16="http://schemas.microsoft.com/office/drawing/2014/main" id="{3C90EC24-62CB-E17B-928C-641F74404046}"/>
+                <a16:creationId xmlns:a16="http://schemas.microsoft.com/office/drawing/2014/main" id="{4D35A37C-E36C-55F2-A680-2823F4563403}"/>
               </a:ext>
             </a:extLst>
           </p:cNvPr>
@@ -585,7 +585,7 @@
           <p:cNvPr id="3" name="Vertical Text Placeholder 2">
             <a:extLst>
               <a:ext uri="{FF2B5EF4-FFF2-40B4-BE49-F238E27FC236}">
-                <a16:creationId xmlns:a16="http://schemas.microsoft.com/office/drawing/2014/main" id="{47E4E180-AAAE-457A-3324-7B9AC6CF0A9B}"/>
+                <a16:creationId xmlns:a16="http://schemas.microsoft.com/office/drawing/2014/main" id="{5B8712F5-3C49-B731-8F34-E8AB99D80CEE}"/>
               </a:ext>
             </a:extLst>
           </p:cNvPr>
@@ -648,7 +648,7 @@
           <p:cNvPr id="4" name="Date Placeholder 3">
             <a:extLst>
               <a:ext uri="{FF2B5EF4-FFF2-40B4-BE49-F238E27FC236}">
-                <a16:creationId xmlns:a16="http://schemas.microsoft.com/office/drawing/2014/main" id="{C415B299-34C6-E253-F7D9-EAB02EA2C66A}"/>
+                <a16:creationId xmlns:a16="http://schemas.microsoft.com/office/drawing/2014/main" id="{6A6D6414-4A6C-8B33-3C19-E4FF012240BB}"/>
               </a:ext>
             </a:extLst>
           </p:cNvPr>
@@ -664,9 +664,9 @@
           <a:bodyPr/>
           <a:lstStyle/>
           <a:p>
-            <a:fld id="{D7BF77C4-1D67-4110-AA8D-11E51ED4D64C}" type="datetimeFigureOut">
+            <a:fld id="{E41E57C9-2898-4A86-BD65-A6AADA69DC43}" type="datetimeFigureOut">
               <a:rPr lang="id-ID" smtClean="0"/>
-              <a:t>26/06/2026</a:t>
+              <a:t>27/06/2026</a:t>
             </a:fld>
             <a:endParaRPr lang="id-ID"/>
           </a:p>
@@ -677,7 +677,7 @@
           <p:cNvPr id="5" name="Footer Placeholder 4">
             <a:extLst>
               <a:ext uri="{FF2B5EF4-FFF2-40B4-BE49-F238E27FC236}">
-                <a16:creationId xmlns:a16="http://schemas.microsoft.com/office/drawing/2014/main" id="{33871D35-9C70-5774-4638-14B1953046D6}"/>
+                <a16:creationId xmlns:a16="http://schemas.microsoft.com/office/drawing/2014/main" id="{BAD4B3D9-CFA2-E298-9BB5-08F0A806D4AE}"/>
               </a:ext>
             </a:extLst>
           </p:cNvPr>
@@ -702,7 +702,7 @@
           <p:cNvPr id="6" name="Slide Number Placeholder 5">
             <a:extLst>
               <a:ext uri="{FF2B5EF4-FFF2-40B4-BE49-F238E27FC236}">
-                <a16:creationId xmlns:a16="http://schemas.microsoft.com/office/drawing/2014/main" id="{04CA33E9-214F-0484-C70C-303FBD252768}"/>
+                <a16:creationId xmlns:a16="http://schemas.microsoft.com/office/drawing/2014/main" id="{D88E16F4-47CD-7C2B-7C03-F214CD19DE73}"/>
               </a:ext>
             </a:extLst>
           </p:cNvPr>
@@ -718,7 +718,7 @@
           <a:bodyPr/>
           <a:lstStyle/>
           <a:p>
-            <a:fld id="{E7818D08-E1D4-4ED2-B1A5-3F9D52E030B6}" type="slidenum">
+            <a:fld id="{F08BCEDC-FE0E-414F-8D37-A32F8FC22AC3}" type="slidenum">
               <a:rPr lang="id-ID" smtClean="0"/>
               <a:t>‹#›</a:t>
             </a:fld>
@@ -729,7 +729,7 @@
     </p:spTree>
     <p:extLst>
       <p:ext uri="{BB962C8B-B14F-4D97-AF65-F5344CB8AC3E}">
-        <p14:creationId xmlns:p14="http://schemas.microsoft.com/office/powerpoint/2010/main" val="3855363997"/>
+        <p14:creationId xmlns:p14="http://schemas.microsoft.com/office/powerpoint/2010/main" val="2486630115"/>
       </p:ext>
     </p:extLst>
   </p:cSld>
@@ -761,7 +761,7 @@
           <p:cNvPr id="2" name="Title 1">
             <a:extLst>
               <a:ext uri="{FF2B5EF4-FFF2-40B4-BE49-F238E27FC236}">
-                <a16:creationId xmlns:a16="http://schemas.microsoft.com/office/drawing/2014/main" id="{CC6747F0-4AF0-2DA6-7EE9-3B365C9C10E9}"/>
+                <a16:creationId xmlns:a16="http://schemas.microsoft.com/office/drawing/2014/main" id="{C2F1AE91-378B-1ED6-B6A8-C0D8058E3BC1}"/>
               </a:ext>
             </a:extLst>
           </p:cNvPr>
@@ -790,7 +790,7 @@
           <p:cNvPr id="3" name="Content Placeholder 2">
             <a:extLst>
               <a:ext uri="{FF2B5EF4-FFF2-40B4-BE49-F238E27FC236}">
-                <a16:creationId xmlns:a16="http://schemas.microsoft.com/office/drawing/2014/main" id="{F2189344-EA00-D79E-8FF6-00E3B6D54B06}"/>
+                <a16:creationId xmlns:a16="http://schemas.microsoft.com/office/drawing/2014/main" id="{A8EC9CDE-2100-DC02-0D0B-5C9A26F4EBFE}"/>
               </a:ext>
             </a:extLst>
           </p:cNvPr>
@@ -848,7 +848,7 @@
           <p:cNvPr id="4" name="Date Placeholder 3">
             <a:extLst>
               <a:ext uri="{FF2B5EF4-FFF2-40B4-BE49-F238E27FC236}">
-                <a16:creationId xmlns:a16="http://schemas.microsoft.com/office/drawing/2014/main" id="{FA61C774-2327-C1F6-5D9A-910574DF4CBF}"/>
+                <a16:creationId xmlns:a16="http://schemas.microsoft.com/office/drawing/2014/main" id="{43544874-0BAD-3E2B-DA27-490C6D14D15B}"/>
               </a:ext>
             </a:extLst>
           </p:cNvPr>
@@ -864,9 +864,9 @@
           <a:bodyPr/>
           <a:lstStyle/>
           <a:p>
-            <a:fld id="{D7BF77C4-1D67-4110-AA8D-11E51ED4D64C}" type="datetimeFigureOut">
+            <a:fld id="{E41E57C9-2898-4A86-BD65-A6AADA69DC43}" type="datetimeFigureOut">
               <a:rPr lang="id-ID" smtClean="0"/>
-              <a:t>26/06/2026</a:t>
+              <a:t>27/06/2026</a:t>
             </a:fld>
             <a:endParaRPr lang="id-ID"/>
           </a:p>
@@ -877,7 +877,7 @@
           <p:cNvPr id="5" name="Footer Placeholder 4">
             <a:extLst>
               <a:ext uri="{FF2B5EF4-FFF2-40B4-BE49-F238E27FC236}">
-                <a16:creationId xmlns:a16="http://schemas.microsoft.com/office/drawing/2014/main" id="{4EBFD9D2-BDF9-9370-B2F8-EEBE80684F22}"/>
+                <a16:creationId xmlns:a16="http://schemas.microsoft.com/office/drawing/2014/main" id="{F18429AC-0F2E-B1AF-BC20-79E98A9CED01}"/>
               </a:ext>
             </a:extLst>
           </p:cNvPr>
@@ -902,7 +902,7 @@
           <p:cNvPr id="6" name="Slide Number Placeholder 5">
             <a:extLst>
               <a:ext uri="{FF2B5EF4-FFF2-40B4-BE49-F238E27FC236}">
-                <a16:creationId xmlns:a16="http://schemas.microsoft.com/office/drawing/2014/main" id="{3A44754B-DC8B-3D13-6835-84A2F7E33ADB}"/>
+                <a16:creationId xmlns:a16="http://schemas.microsoft.com/office/drawing/2014/main" id="{CC325D0C-A1DF-85B3-936F-41DD978F9438}"/>
               </a:ext>
             </a:extLst>
           </p:cNvPr>
@@ -918,7 +918,7 @@
           <a:bodyPr/>
           <a:lstStyle/>
           <a:p>
-            <a:fld id="{E7818D08-E1D4-4ED2-B1A5-3F9D52E030B6}" type="slidenum">
+            <a:fld id="{F08BCEDC-FE0E-414F-8D37-A32F8FC22AC3}" type="slidenum">
               <a:rPr lang="id-ID" smtClean="0"/>
               <a:t>‹#›</a:t>
             </a:fld>
@@ -929,7 +929,7 @@
     </p:spTree>
     <p:extLst>
       <p:ext uri="{BB962C8B-B14F-4D97-AF65-F5344CB8AC3E}">
-        <p14:creationId xmlns:p14="http://schemas.microsoft.com/office/powerpoint/2010/main" val="44580242"/>
+        <p14:creationId xmlns:p14="http://schemas.microsoft.com/office/powerpoint/2010/main" val="2724303039"/>
       </p:ext>
     </p:extLst>
   </p:cSld>
@@ -961,7 +961,7 @@
           <p:cNvPr id="2" name="Title 1">
             <a:extLst>
               <a:ext uri="{FF2B5EF4-FFF2-40B4-BE49-F238E27FC236}">
-                <a16:creationId xmlns:a16="http://schemas.microsoft.com/office/drawing/2014/main" id="{316ADD71-ED5C-01E6-5C7A-577E07F0414B}"/>
+                <a16:creationId xmlns:a16="http://schemas.microsoft.com/office/drawing/2014/main" id="{2FA25C34-76F8-7B7B-378B-E2617C4B1174}"/>
               </a:ext>
             </a:extLst>
           </p:cNvPr>
@@ -999,7 +999,7 @@
           <p:cNvPr id="3" name="Text Placeholder 2">
             <a:extLst>
               <a:ext uri="{FF2B5EF4-FFF2-40B4-BE49-F238E27FC236}">
-                <a16:creationId xmlns:a16="http://schemas.microsoft.com/office/drawing/2014/main" id="{C21FEBC3-E914-E91F-732C-55E5145D51F7}"/>
+                <a16:creationId xmlns:a16="http://schemas.microsoft.com/office/drawing/2014/main" id="{556CC542-3368-B33E-93EE-63E1A2108C35}"/>
               </a:ext>
             </a:extLst>
           </p:cNvPr>
@@ -1124,7 +1124,7 @@
           <p:cNvPr id="4" name="Date Placeholder 3">
             <a:extLst>
               <a:ext uri="{FF2B5EF4-FFF2-40B4-BE49-F238E27FC236}">
-                <a16:creationId xmlns:a16="http://schemas.microsoft.com/office/drawing/2014/main" id="{1246D3CA-E207-B068-E520-F0AB9B5AD601}"/>
+                <a16:creationId xmlns:a16="http://schemas.microsoft.com/office/drawing/2014/main" id="{3740804C-2A8D-D09F-42C2-4ADFF5C0B801}"/>
               </a:ext>
             </a:extLst>
           </p:cNvPr>
@@ -1140,9 +1140,9 @@
           <a:bodyPr/>
           <a:lstStyle/>
           <a:p>
-            <a:fld id="{D7BF77C4-1D67-4110-AA8D-11E51ED4D64C}" type="datetimeFigureOut">
+            <a:fld id="{E41E57C9-2898-4A86-BD65-A6AADA69DC43}" type="datetimeFigureOut">
               <a:rPr lang="id-ID" smtClean="0"/>
-              <a:t>26/06/2026</a:t>
+              <a:t>27/06/2026</a:t>
             </a:fld>
             <a:endParaRPr lang="id-ID"/>
           </a:p>
@@ -1153,7 +1153,7 @@
           <p:cNvPr id="5" name="Footer Placeholder 4">
             <a:extLst>
               <a:ext uri="{FF2B5EF4-FFF2-40B4-BE49-F238E27FC236}">
-                <a16:creationId xmlns:a16="http://schemas.microsoft.com/office/drawing/2014/main" id="{9649A1D4-EABB-9556-6C92-9A2F07BF0B42}"/>
+                <a16:creationId xmlns:a16="http://schemas.microsoft.com/office/drawing/2014/main" id="{23C268FB-8192-08FA-93C5-C82253B24330}"/>
               </a:ext>
             </a:extLst>
           </p:cNvPr>
@@ -1178,7 +1178,7 @@
           <p:cNvPr id="6" name="Slide Number Placeholder 5">
             <a:extLst>
               <a:ext uri="{FF2B5EF4-FFF2-40B4-BE49-F238E27FC236}">
-                <a16:creationId xmlns:a16="http://schemas.microsoft.com/office/drawing/2014/main" id="{A7EFC16A-4107-071B-2D11-B1637DDE0502}"/>
+                <a16:creationId xmlns:a16="http://schemas.microsoft.com/office/drawing/2014/main" id="{7A64960F-3F89-67F1-77F9-EE603988DA30}"/>
               </a:ext>
             </a:extLst>
           </p:cNvPr>
@@ -1194,7 +1194,7 @@
           <a:bodyPr/>
           <a:lstStyle/>
           <a:p>
-            <a:fld id="{E7818D08-E1D4-4ED2-B1A5-3F9D52E030B6}" type="slidenum">
+            <a:fld id="{F08BCEDC-FE0E-414F-8D37-A32F8FC22AC3}" type="slidenum">
               <a:rPr lang="id-ID" smtClean="0"/>
               <a:t>‹#›</a:t>
             </a:fld>
@@ -1205,7 +1205,7 @@
     </p:spTree>
     <p:extLst>
       <p:ext uri="{BB962C8B-B14F-4D97-AF65-F5344CB8AC3E}">
-        <p14:creationId xmlns:p14="http://schemas.microsoft.com/office/powerpoint/2010/main" val="666291937"/>
+        <p14:creationId xmlns:p14="http://schemas.microsoft.com/office/powerpoint/2010/main" val="3054303589"/>
       </p:ext>
     </p:extLst>
   </p:cSld>
@@ -1237,7 +1237,7 @@
           <p:cNvPr id="2" name="Title 1">
             <a:extLst>
               <a:ext uri="{FF2B5EF4-FFF2-40B4-BE49-F238E27FC236}">
-                <a16:creationId xmlns:a16="http://schemas.microsoft.com/office/drawing/2014/main" id="{4DFFEF45-38FA-9FF5-635E-6558084AEF23}"/>
+                <a16:creationId xmlns:a16="http://schemas.microsoft.com/office/drawing/2014/main" id="{8649EF65-3E2F-8473-98D2-3E9B77A34045}"/>
               </a:ext>
             </a:extLst>
           </p:cNvPr>
@@ -1266,7 +1266,7 @@
           <p:cNvPr id="3" name="Content Placeholder 2">
             <a:extLst>
               <a:ext uri="{FF2B5EF4-FFF2-40B4-BE49-F238E27FC236}">
-                <a16:creationId xmlns:a16="http://schemas.microsoft.com/office/drawing/2014/main" id="{46182383-312B-B4DA-26C4-3F1C08686156}"/>
+                <a16:creationId xmlns:a16="http://schemas.microsoft.com/office/drawing/2014/main" id="{8A3297D0-E3BE-AC24-EAF0-6EA339A0F7F6}"/>
               </a:ext>
             </a:extLst>
           </p:cNvPr>
@@ -1329,7 +1329,7 @@
           <p:cNvPr id="4" name="Content Placeholder 3">
             <a:extLst>
               <a:ext uri="{FF2B5EF4-FFF2-40B4-BE49-F238E27FC236}">
-                <a16:creationId xmlns:a16="http://schemas.microsoft.com/office/drawing/2014/main" id="{701B301B-A56F-4B36-67EB-8E8F54E568EF}"/>
+                <a16:creationId xmlns:a16="http://schemas.microsoft.com/office/drawing/2014/main" id="{DF0CEDE2-B518-179A-9B8B-DDE6F7EC3D9A}"/>
               </a:ext>
             </a:extLst>
           </p:cNvPr>
@@ -1392,7 +1392,7 @@
           <p:cNvPr id="5" name="Date Placeholder 4">
             <a:extLst>
               <a:ext uri="{FF2B5EF4-FFF2-40B4-BE49-F238E27FC236}">
-                <a16:creationId xmlns:a16="http://schemas.microsoft.com/office/drawing/2014/main" id="{CC2D6DC8-75D1-C073-4C73-907ED995D276}"/>
+                <a16:creationId xmlns:a16="http://schemas.microsoft.com/office/drawing/2014/main" id="{68803D6A-028F-FF85-A323-16758E05BC81}"/>
               </a:ext>
             </a:extLst>
           </p:cNvPr>
@@ -1408,9 +1408,9 @@
           <a:bodyPr/>
           <a:lstStyle/>
           <a:p>
-            <a:fld id="{D7BF77C4-1D67-4110-AA8D-11E51ED4D64C}" type="datetimeFigureOut">
+            <a:fld id="{E41E57C9-2898-4A86-BD65-A6AADA69DC43}" type="datetimeFigureOut">
               <a:rPr lang="id-ID" smtClean="0"/>
-              <a:t>26/06/2026</a:t>
+              <a:t>27/06/2026</a:t>
             </a:fld>
             <a:endParaRPr lang="id-ID"/>
           </a:p>
@@ -1421,7 +1421,7 @@
           <p:cNvPr id="6" name="Footer Placeholder 5">
             <a:extLst>
               <a:ext uri="{FF2B5EF4-FFF2-40B4-BE49-F238E27FC236}">
-                <a16:creationId xmlns:a16="http://schemas.microsoft.com/office/drawing/2014/main" id="{8390FE02-F085-E308-DEAA-53C2ADB8B7F4}"/>
+                <a16:creationId xmlns:a16="http://schemas.microsoft.com/office/drawing/2014/main" id="{36E9866A-C22B-E669-45AD-35B397460C93}"/>
               </a:ext>
             </a:extLst>
           </p:cNvPr>
@@ -1446,7 +1446,7 @@
           <p:cNvPr id="7" name="Slide Number Placeholder 6">
             <a:extLst>
               <a:ext uri="{FF2B5EF4-FFF2-40B4-BE49-F238E27FC236}">
-                <a16:creationId xmlns:a16="http://schemas.microsoft.com/office/drawing/2014/main" id="{64B402BD-5073-B801-AAA2-2970EEF947E4}"/>
+                <a16:creationId xmlns:a16="http://schemas.microsoft.com/office/drawing/2014/main" id="{1F0D33C8-E5DF-E0D8-D056-6524D5DF7498}"/>
               </a:ext>
             </a:extLst>
           </p:cNvPr>
@@ -1462,7 +1462,7 @@
           <a:bodyPr/>
           <a:lstStyle/>
           <a:p>
-            <a:fld id="{E7818D08-E1D4-4ED2-B1A5-3F9D52E030B6}" type="slidenum">
+            <a:fld id="{F08BCEDC-FE0E-414F-8D37-A32F8FC22AC3}" type="slidenum">
               <a:rPr lang="id-ID" smtClean="0"/>
               <a:t>‹#›</a:t>
             </a:fld>
@@ -1473,7 +1473,7 @@
     </p:spTree>
     <p:extLst>
       <p:ext uri="{BB962C8B-B14F-4D97-AF65-F5344CB8AC3E}">
-        <p14:creationId xmlns:p14="http://schemas.microsoft.com/office/powerpoint/2010/main" val="4153991085"/>
+        <p14:creationId xmlns:p14="http://schemas.microsoft.com/office/powerpoint/2010/main" val="3381680877"/>
       </p:ext>
     </p:extLst>
   </p:cSld>
@@ -1505,7 +1505,7 @@
           <p:cNvPr id="2" name="Title 1">
             <a:extLst>
               <a:ext uri="{FF2B5EF4-FFF2-40B4-BE49-F238E27FC236}">
-                <a16:creationId xmlns:a16="http://schemas.microsoft.com/office/drawing/2014/main" id="{C9DD3D52-34C3-60D2-20AC-8E0420D8B3A5}"/>
+                <a16:creationId xmlns:a16="http://schemas.microsoft.com/office/drawing/2014/main" id="{87472AAE-B865-4FAF-BD90-3CF8047B0DA8}"/>
               </a:ext>
             </a:extLst>
           </p:cNvPr>
@@ -1539,7 +1539,7 @@
           <p:cNvPr id="3" name="Text Placeholder 2">
             <a:extLst>
               <a:ext uri="{FF2B5EF4-FFF2-40B4-BE49-F238E27FC236}">
-                <a16:creationId xmlns:a16="http://schemas.microsoft.com/office/drawing/2014/main" id="{3DE428EF-DA9C-AFDB-E1EC-6896171EBC54}"/>
+                <a16:creationId xmlns:a16="http://schemas.microsoft.com/office/drawing/2014/main" id="{37605AC8-8F6B-026E-CEDA-876DCEC5305D}"/>
               </a:ext>
             </a:extLst>
           </p:cNvPr>
@@ -1610,7 +1610,7 @@
           <p:cNvPr id="4" name="Content Placeholder 3">
             <a:extLst>
               <a:ext uri="{FF2B5EF4-FFF2-40B4-BE49-F238E27FC236}">
-                <a16:creationId xmlns:a16="http://schemas.microsoft.com/office/drawing/2014/main" id="{1E6C709C-2E76-9430-1C72-C67B698E2B7E}"/>
+                <a16:creationId xmlns:a16="http://schemas.microsoft.com/office/drawing/2014/main" id="{5C866532-ADD3-61D0-D843-9796E25E384F}"/>
               </a:ext>
             </a:extLst>
           </p:cNvPr>
@@ -1673,7 +1673,7 @@
           <p:cNvPr id="5" name="Text Placeholder 4">
             <a:extLst>
               <a:ext uri="{FF2B5EF4-FFF2-40B4-BE49-F238E27FC236}">
-                <a16:creationId xmlns:a16="http://schemas.microsoft.com/office/drawing/2014/main" id="{F2DD3A93-0B78-74F9-747C-C305D6E5DBAC}"/>
+                <a16:creationId xmlns:a16="http://schemas.microsoft.com/office/drawing/2014/main" id="{52E445AB-19C4-2D1B-C499-C41FC53DC3DE}"/>
               </a:ext>
             </a:extLst>
           </p:cNvPr>
@@ -1744,7 +1744,7 @@
           <p:cNvPr id="6" name="Content Placeholder 5">
             <a:extLst>
               <a:ext uri="{FF2B5EF4-FFF2-40B4-BE49-F238E27FC236}">
-                <a16:creationId xmlns:a16="http://schemas.microsoft.com/office/drawing/2014/main" id="{8234CD27-79DC-D45F-E9DB-4AD1FE15129C}"/>
+                <a16:creationId xmlns:a16="http://schemas.microsoft.com/office/drawing/2014/main" id="{F65D9BA1-313E-7954-3A0E-1891D67A5F5A}"/>
               </a:ext>
             </a:extLst>
           </p:cNvPr>
@@ -1807,7 +1807,7 @@
           <p:cNvPr id="7" name="Date Placeholder 6">
             <a:extLst>
               <a:ext uri="{FF2B5EF4-FFF2-40B4-BE49-F238E27FC236}">
-                <a16:creationId xmlns:a16="http://schemas.microsoft.com/office/drawing/2014/main" id="{A41F0DD4-ED19-F31D-A92C-5B3FA30683C5}"/>
+                <a16:creationId xmlns:a16="http://schemas.microsoft.com/office/drawing/2014/main" id="{7E0E5396-DAF6-E5D9-EC12-CB7B810A3765}"/>
               </a:ext>
             </a:extLst>
           </p:cNvPr>
@@ -1823,9 +1823,9 @@
           <a:bodyPr/>
           <a:lstStyle/>
           <a:p>
-            <a:fld id="{D7BF77C4-1D67-4110-AA8D-11E51ED4D64C}" type="datetimeFigureOut">
+            <a:fld id="{E41E57C9-2898-4A86-BD65-A6AADA69DC43}" type="datetimeFigureOut">
               <a:rPr lang="id-ID" smtClean="0"/>
-              <a:t>26/06/2026</a:t>
+              <a:t>27/06/2026</a:t>
             </a:fld>
             <a:endParaRPr lang="id-ID"/>
           </a:p>
@@ -1836,7 +1836,7 @@
           <p:cNvPr id="8" name="Footer Placeholder 7">
             <a:extLst>
               <a:ext uri="{FF2B5EF4-FFF2-40B4-BE49-F238E27FC236}">
-                <a16:creationId xmlns:a16="http://schemas.microsoft.com/office/drawing/2014/main" id="{5BCE539E-B5FC-0F91-1A2B-80F6C9902335}"/>
+                <a16:creationId xmlns:a16="http://schemas.microsoft.com/office/drawing/2014/main" id="{76EB1F78-161E-7FD6-DA68-8B1832CD415F}"/>
               </a:ext>
             </a:extLst>
           </p:cNvPr>
@@ -1861,7 +1861,7 @@
           <p:cNvPr id="9" name="Slide Number Placeholder 8">
             <a:extLst>
               <a:ext uri="{FF2B5EF4-FFF2-40B4-BE49-F238E27FC236}">
-                <a16:creationId xmlns:a16="http://schemas.microsoft.com/office/drawing/2014/main" id="{A24013E1-8BE7-7B4D-754A-C6D9E9A02DF8}"/>
+                <a16:creationId xmlns:a16="http://schemas.microsoft.com/office/drawing/2014/main" id="{505CF541-3F47-201C-AA06-72421C2B3BE3}"/>
               </a:ext>
             </a:extLst>
           </p:cNvPr>
@@ -1877,7 +1877,7 @@
           <a:bodyPr/>
           <a:lstStyle/>
           <a:p>
-            <a:fld id="{E7818D08-E1D4-4ED2-B1A5-3F9D52E030B6}" type="slidenum">
+            <a:fld id="{F08BCEDC-FE0E-414F-8D37-A32F8FC22AC3}" type="slidenum">
               <a:rPr lang="id-ID" smtClean="0"/>
               <a:t>‹#›</a:t>
             </a:fld>
@@ -1888,7 +1888,7 @@
     </p:spTree>
     <p:extLst>
       <p:ext uri="{BB962C8B-B14F-4D97-AF65-F5344CB8AC3E}">
-        <p14:creationId xmlns:p14="http://schemas.microsoft.com/office/powerpoint/2010/main" val="1026380743"/>
+        <p14:creationId xmlns:p14="http://schemas.microsoft.com/office/powerpoint/2010/main" val="905547120"/>
       </p:ext>
     </p:extLst>
   </p:cSld>
@@ -1920,7 +1920,7 @@
           <p:cNvPr id="2" name="Title 1">
             <a:extLst>
               <a:ext uri="{FF2B5EF4-FFF2-40B4-BE49-F238E27FC236}">
-                <a16:creationId xmlns:a16="http://schemas.microsoft.com/office/drawing/2014/main" id="{B28F4CC7-7CD2-258D-2EE9-5A324752F280}"/>
+                <a16:creationId xmlns:a16="http://schemas.microsoft.com/office/drawing/2014/main" id="{04EE8827-7A4E-7241-9823-2B17DD942DAE}"/>
               </a:ext>
             </a:extLst>
           </p:cNvPr>
@@ -1949,7 +1949,7 @@
           <p:cNvPr id="3" name="Date Placeholder 2">
             <a:extLst>
               <a:ext uri="{FF2B5EF4-FFF2-40B4-BE49-F238E27FC236}">
-                <a16:creationId xmlns:a16="http://schemas.microsoft.com/office/drawing/2014/main" id="{EC6BD23E-8CCE-55B3-43BF-72A2B6844AA8}"/>
+                <a16:creationId xmlns:a16="http://schemas.microsoft.com/office/drawing/2014/main" id="{AEF8C9C8-1612-2731-F654-6C27C2B935C1}"/>
               </a:ext>
             </a:extLst>
           </p:cNvPr>
@@ -1965,9 +1965,9 @@
           <a:bodyPr/>
           <a:lstStyle/>
           <a:p>
-            <a:fld id="{D7BF77C4-1D67-4110-AA8D-11E51ED4D64C}" type="datetimeFigureOut">
+            <a:fld id="{E41E57C9-2898-4A86-BD65-A6AADA69DC43}" type="datetimeFigureOut">
               <a:rPr lang="id-ID" smtClean="0"/>
-              <a:t>26/06/2026</a:t>
+              <a:t>27/06/2026</a:t>
             </a:fld>
             <a:endParaRPr lang="id-ID"/>
           </a:p>
@@ -1978,7 +1978,7 @@
           <p:cNvPr id="4" name="Footer Placeholder 3">
             <a:extLst>
               <a:ext uri="{FF2B5EF4-FFF2-40B4-BE49-F238E27FC236}">
-                <a16:creationId xmlns:a16="http://schemas.microsoft.com/office/drawing/2014/main" id="{B7AA2E1B-27E9-E75E-0594-A7F3A6832EF4}"/>
+                <a16:creationId xmlns:a16="http://schemas.microsoft.com/office/drawing/2014/main" id="{8D966A5E-0107-9EC9-F8C9-59C80EE54C25}"/>
               </a:ext>
             </a:extLst>
           </p:cNvPr>
@@ -2003,7 +2003,7 @@
           <p:cNvPr id="5" name="Slide Number Placeholder 4">
             <a:extLst>
               <a:ext uri="{FF2B5EF4-FFF2-40B4-BE49-F238E27FC236}">
-                <a16:creationId xmlns:a16="http://schemas.microsoft.com/office/drawing/2014/main" id="{B86B869D-3E11-3CDF-6B79-41F586D00646}"/>
+                <a16:creationId xmlns:a16="http://schemas.microsoft.com/office/drawing/2014/main" id="{9CAE782C-7B79-3B15-117B-6239E04BAFA1}"/>
               </a:ext>
             </a:extLst>
           </p:cNvPr>
@@ -2019,7 +2019,7 @@
           <a:bodyPr/>
           <a:lstStyle/>
           <a:p>
-            <a:fld id="{E7818D08-E1D4-4ED2-B1A5-3F9D52E030B6}" type="slidenum">
+            <a:fld id="{F08BCEDC-FE0E-414F-8D37-A32F8FC22AC3}" type="slidenum">
               <a:rPr lang="id-ID" smtClean="0"/>
               <a:t>‹#›</a:t>
             </a:fld>
@@ -2030,7 +2030,7 @@
     </p:spTree>
     <p:extLst>
       <p:ext uri="{BB962C8B-B14F-4D97-AF65-F5344CB8AC3E}">
-        <p14:creationId xmlns:p14="http://schemas.microsoft.com/office/powerpoint/2010/main" val="1727296913"/>
+        <p14:creationId xmlns:p14="http://schemas.microsoft.com/office/powerpoint/2010/main" val="2991128899"/>
       </p:ext>
     </p:extLst>
   </p:cSld>
@@ -2062,7 +2062,7 @@
           <p:cNvPr id="2" name="Date Placeholder 1">
             <a:extLst>
               <a:ext uri="{FF2B5EF4-FFF2-40B4-BE49-F238E27FC236}">
-                <a16:creationId xmlns:a16="http://schemas.microsoft.com/office/drawing/2014/main" id="{6AB2833E-1B34-32C0-2C0F-B12501376E83}"/>
+                <a16:creationId xmlns:a16="http://schemas.microsoft.com/office/drawing/2014/main" id="{C33EAA02-7784-14F3-7E77-22A4D83EAD90}"/>
               </a:ext>
             </a:extLst>
           </p:cNvPr>
@@ -2078,9 +2078,9 @@
           <a:bodyPr/>
           <a:lstStyle/>
           <a:p>
-            <a:fld id="{D7BF77C4-1D67-4110-AA8D-11E51ED4D64C}" type="datetimeFigureOut">
+            <a:fld id="{E41E57C9-2898-4A86-BD65-A6AADA69DC43}" type="datetimeFigureOut">
               <a:rPr lang="id-ID" smtClean="0"/>
-              <a:t>26/06/2026</a:t>
+              <a:t>27/06/2026</a:t>
             </a:fld>
             <a:endParaRPr lang="id-ID"/>
           </a:p>
@@ -2091,7 +2091,7 @@
           <p:cNvPr id="3" name="Footer Placeholder 2">
             <a:extLst>
               <a:ext uri="{FF2B5EF4-FFF2-40B4-BE49-F238E27FC236}">
-                <a16:creationId xmlns:a16="http://schemas.microsoft.com/office/drawing/2014/main" id="{7E10D09D-0563-F166-4E36-22B5EA6F3FC6}"/>
+                <a16:creationId xmlns:a16="http://schemas.microsoft.com/office/drawing/2014/main" id="{3AED177F-35B9-5BB0-BBF0-413FC689C6DA}"/>
               </a:ext>
             </a:extLst>
           </p:cNvPr>
@@ -2116,7 +2116,7 @@
           <p:cNvPr id="4" name="Slide Number Placeholder 3">
             <a:extLst>
               <a:ext uri="{FF2B5EF4-FFF2-40B4-BE49-F238E27FC236}">
-                <a16:creationId xmlns:a16="http://schemas.microsoft.com/office/drawing/2014/main" id="{B43C408B-9D07-A67B-2579-41BB0F345699}"/>
+                <a16:creationId xmlns:a16="http://schemas.microsoft.com/office/drawing/2014/main" id="{593F67C6-EF3B-863B-359C-39828E16ECF8}"/>
               </a:ext>
             </a:extLst>
           </p:cNvPr>
@@ -2132,7 +2132,7 @@
           <a:bodyPr/>
           <a:lstStyle/>
           <a:p>
-            <a:fld id="{E7818D08-E1D4-4ED2-B1A5-3F9D52E030B6}" type="slidenum">
+            <a:fld id="{F08BCEDC-FE0E-414F-8D37-A32F8FC22AC3}" type="slidenum">
               <a:rPr lang="id-ID" smtClean="0"/>
               <a:t>‹#›</a:t>
             </a:fld>
@@ -2143,7 +2143,7 @@
     </p:spTree>
     <p:extLst>
       <p:ext uri="{BB962C8B-B14F-4D97-AF65-F5344CB8AC3E}">
-        <p14:creationId xmlns:p14="http://schemas.microsoft.com/office/powerpoint/2010/main" val="615028546"/>
+        <p14:creationId xmlns:p14="http://schemas.microsoft.com/office/powerpoint/2010/main" val="1355345086"/>
       </p:ext>
     </p:extLst>
   </p:cSld>
@@ -2175,7 +2175,7 @@
           <p:cNvPr id="2" name="Title 1">
             <a:extLst>
               <a:ext uri="{FF2B5EF4-FFF2-40B4-BE49-F238E27FC236}">
-                <a16:creationId xmlns:a16="http://schemas.microsoft.com/office/drawing/2014/main" id="{0233F60D-5B3B-5AB6-A26D-958FA249D992}"/>
+                <a16:creationId xmlns:a16="http://schemas.microsoft.com/office/drawing/2014/main" id="{0F204F08-2409-4327-5701-9AB04A7FA225}"/>
               </a:ext>
             </a:extLst>
           </p:cNvPr>
@@ -2213,7 +2213,7 @@
           <p:cNvPr id="3" name="Content Placeholder 2">
             <a:extLst>
               <a:ext uri="{FF2B5EF4-FFF2-40B4-BE49-F238E27FC236}">
-                <a16:creationId xmlns:a16="http://schemas.microsoft.com/office/drawing/2014/main" id="{99CDE33E-5195-129D-52C9-B284CDE8BCBA}"/>
+                <a16:creationId xmlns:a16="http://schemas.microsoft.com/office/drawing/2014/main" id="{584E749C-0EDC-D8C1-1CDF-20164A390799}"/>
               </a:ext>
             </a:extLst>
           </p:cNvPr>
@@ -2304,7 +2304,7 @@
           <p:cNvPr id="4" name="Text Placeholder 3">
             <a:extLst>
               <a:ext uri="{FF2B5EF4-FFF2-40B4-BE49-F238E27FC236}">
-                <a16:creationId xmlns:a16="http://schemas.microsoft.com/office/drawing/2014/main" id="{7079EA62-5B26-3336-3962-2AEF14A62328}"/>
+                <a16:creationId xmlns:a16="http://schemas.microsoft.com/office/drawing/2014/main" id="{BB0A2998-1D71-CD3F-DDBF-E1B853A24768}"/>
               </a:ext>
             </a:extLst>
           </p:cNvPr>
@@ -2375,7 +2375,7 @@
           <p:cNvPr id="5" name="Date Placeholder 4">
             <a:extLst>
               <a:ext uri="{FF2B5EF4-FFF2-40B4-BE49-F238E27FC236}">
-                <a16:creationId xmlns:a16="http://schemas.microsoft.com/office/drawing/2014/main" id="{66C1EEB5-D861-9711-5D17-6174386735BD}"/>
+                <a16:creationId xmlns:a16="http://schemas.microsoft.com/office/drawing/2014/main" id="{DB8E2AFC-B484-E3AC-2FC7-0F7A22E5859D}"/>
               </a:ext>
             </a:extLst>
           </p:cNvPr>
@@ -2391,9 +2391,9 @@
           <a:bodyPr/>
           <a:lstStyle/>
           <a:p>
-            <a:fld id="{D7BF77C4-1D67-4110-AA8D-11E51ED4D64C}" type="datetimeFigureOut">
+            <a:fld id="{E41E57C9-2898-4A86-BD65-A6AADA69DC43}" type="datetimeFigureOut">
               <a:rPr lang="id-ID" smtClean="0"/>
-              <a:t>26/06/2026</a:t>
+              <a:t>27/06/2026</a:t>
             </a:fld>
             <a:endParaRPr lang="id-ID"/>
           </a:p>
@@ -2404,7 +2404,7 @@
           <p:cNvPr id="6" name="Footer Placeholder 5">
             <a:extLst>
               <a:ext uri="{FF2B5EF4-FFF2-40B4-BE49-F238E27FC236}">
-                <a16:creationId xmlns:a16="http://schemas.microsoft.com/office/drawing/2014/main" id="{129680D2-BEF5-4C31-4998-B82A9572A83A}"/>
+                <a16:creationId xmlns:a16="http://schemas.microsoft.com/office/drawing/2014/main" id="{F8095369-9582-3BE3-1881-78B0E2D9EF2B}"/>
               </a:ext>
             </a:extLst>
           </p:cNvPr>
@@ -2429,7 +2429,7 @@
           <p:cNvPr id="7" name="Slide Number Placeholder 6">
             <a:extLst>
               <a:ext uri="{FF2B5EF4-FFF2-40B4-BE49-F238E27FC236}">
-                <a16:creationId xmlns:a16="http://schemas.microsoft.com/office/drawing/2014/main" id="{067F260B-5742-A747-876C-CF8E88E68D74}"/>
+                <a16:creationId xmlns:a16="http://schemas.microsoft.com/office/drawing/2014/main" id="{87531E2B-1AC1-120A-0F70-04731F445D60}"/>
               </a:ext>
             </a:extLst>
           </p:cNvPr>
@@ -2445,7 +2445,7 @@
           <a:bodyPr/>
           <a:lstStyle/>
           <a:p>
-            <a:fld id="{E7818D08-E1D4-4ED2-B1A5-3F9D52E030B6}" type="slidenum">
+            <a:fld id="{F08BCEDC-FE0E-414F-8D37-A32F8FC22AC3}" type="slidenum">
               <a:rPr lang="id-ID" smtClean="0"/>
               <a:t>‹#›</a:t>
             </a:fld>
@@ -2456,7 +2456,7 @@
     </p:spTree>
     <p:extLst>
       <p:ext uri="{BB962C8B-B14F-4D97-AF65-F5344CB8AC3E}">
-        <p14:creationId xmlns:p14="http://schemas.microsoft.com/office/powerpoint/2010/main" val="1704051726"/>
+        <p14:creationId xmlns:p14="http://schemas.microsoft.com/office/powerpoint/2010/main" val="3460446829"/>
       </p:ext>
     </p:extLst>
   </p:cSld>
@@ -2488,7 +2488,7 @@
           <p:cNvPr id="2" name="Title 1">
             <a:extLst>
               <a:ext uri="{FF2B5EF4-FFF2-40B4-BE49-F238E27FC236}">
-                <a16:creationId xmlns:a16="http://schemas.microsoft.com/office/drawing/2014/main" id="{1C0E8BCB-599E-E7E9-B27E-15E4750B8946}"/>
+                <a16:creationId xmlns:a16="http://schemas.microsoft.com/office/drawing/2014/main" id="{2D7FDADF-981D-7F48-482B-D358A2DFC467}"/>
               </a:ext>
             </a:extLst>
           </p:cNvPr>
@@ -2526,7 +2526,7 @@
           <p:cNvPr id="3" name="Picture Placeholder 2">
             <a:extLst>
               <a:ext uri="{FF2B5EF4-FFF2-40B4-BE49-F238E27FC236}">
-                <a16:creationId xmlns:a16="http://schemas.microsoft.com/office/drawing/2014/main" id="{AD1352A9-8EC8-2CFC-6487-F87BAC9F12A7}"/>
+                <a16:creationId xmlns:a16="http://schemas.microsoft.com/office/drawing/2014/main" id="{297557D0-94CD-4656-34BF-5F202B868E83}"/>
               </a:ext>
             </a:extLst>
           </p:cNvPr>
@@ -2593,7 +2593,7 @@
           <p:cNvPr id="4" name="Text Placeholder 3">
             <a:extLst>
               <a:ext uri="{FF2B5EF4-FFF2-40B4-BE49-F238E27FC236}">
-                <a16:creationId xmlns:a16="http://schemas.microsoft.com/office/drawing/2014/main" id="{12E2D3F6-9949-E4D4-D9EA-2C640CE8FB4B}"/>
+                <a16:creationId xmlns:a16="http://schemas.microsoft.com/office/drawing/2014/main" id="{2F0A9E79-86F2-3C1F-CE36-CE15D3ED25C6}"/>
               </a:ext>
             </a:extLst>
           </p:cNvPr>
@@ -2664,7 +2664,7 @@
           <p:cNvPr id="5" name="Date Placeholder 4">
             <a:extLst>
               <a:ext uri="{FF2B5EF4-FFF2-40B4-BE49-F238E27FC236}">
-                <a16:creationId xmlns:a16="http://schemas.microsoft.com/office/drawing/2014/main" id="{11DB9705-808B-F938-BA4A-F03F12FC8E2C}"/>
+                <a16:creationId xmlns:a16="http://schemas.microsoft.com/office/drawing/2014/main" id="{D1448B2E-A6E2-96A1-F59B-56F455B74560}"/>
               </a:ext>
             </a:extLst>
           </p:cNvPr>
@@ -2680,9 +2680,9 @@
           <a:bodyPr/>
           <a:lstStyle/>
           <a:p>
-            <a:fld id="{D7BF77C4-1D67-4110-AA8D-11E51ED4D64C}" type="datetimeFigureOut">
+            <a:fld id="{E41E57C9-2898-4A86-BD65-A6AADA69DC43}" type="datetimeFigureOut">
               <a:rPr lang="id-ID" smtClean="0"/>
-              <a:t>26/06/2026</a:t>
+              <a:t>27/06/2026</a:t>
             </a:fld>
             <a:endParaRPr lang="id-ID"/>
           </a:p>
@@ -2693,7 +2693,7 @@
           <p:cNvPr id="6" name="Footer Placeholder 5">
             <a:extLst>
               <a:ext uri="{FF2B5EF4-FFF2-40B4-BE49-F238E27FC236}">
-                <a16:creationId xmlns:a16="http://schemas.microsoft.com/office/drawing/2014/main" id="{D987F526-95CA-073B-81D8-841A9B4D5480}"/>
+                <a16:creationId xmlns:a16="http://schemas.microsoft.com/office/drawing/2014/main" id="{100A67DE-834D-A8D3-54D0-1AF6644DB398}"/>
               </a:ext>
             </a:extLst>
           </p:cNvPr>
@@ -2718,7 +2718,7 @@
           <p:cNvPr id="7" name="Slide Number Placeholder 6">
             <a:extLst>
               <a:ext uri="{FF2B5EF4-FFF2-40B4-BE49-F238E27FC236}">
-                <a16:creationId xmlns:a16="http://schemas.microsoft.com/office/drawing/2014/main" id="{261007F5-2F0B-BA39-6707-5EB9B52F4252}"/>
+                <a16:creationId xmlns:a16="http://schemas.microsoft.com/office/drawing/2014/main" id="{7BF19B86-891F-EA70-EFFF-BA49D203B620}"/>
               </a:ext>
             </a:extLst>
           </p:cNvPr>
@@ -2734,7 +2734,7 @@
           <a:bodyPr/>
           <a:lstStyle/>
           <a:p>
-            <a:fld id="{E7818D08-E1D4-4ED2-B1A5-3F9D52E030B6}" type="slidenum">
+            <a:fld id="{F08BCEDC-FE0E-414F-8D37-A32F8FC22AC3}" type="slidenum">
               <a:rPr lang="id-ID" smtClean="0"/>
               <a:t>‹#›</a:t>
             </a:fld>
@@ -2745,7 +2745,7 @@
     </p:spTree>
     <p:extLst>
       <p:ext uri="{BB962C8B-B14F-4D97-AF65-F5344CB8AC3E}">
-        <p14:creationId xmlns:p14="http://schemas.microsoft.com/office/powerpoint/2010/main" val="111901949"/>
+        <p14:creationId xmlns:p14="http://schemas.microsoft.com/office/powerpoint/2010/main" val="866231299"/>
       </p:ext>
     </p:extLst>
   </p:cSld>
@@ -2782,7 +2782,7 @@
           <p:cNvPr id="2" name="Title Placeholder 1">
             <a:extLst>
               <a:ext uri="{FF2B5EF4-FFF2-40B4-BE49-F238E27FC236}">
-                <a16:creationId xmlns:a16="http://schemas.microsoft.com/office/drawing/2014/main" id="{D04FAB1E-73D2-2864-1D5D-E83B4FB44FD9}"/>
+                <a16:creationId xmlns:a16="http://schemas.microsoft.com/office/drawing/2014/main" id="{E52DAF98-CBD3-7B0C-146D-339AB0D8A121}"/>
               </a:ext>
             </a:extLst>
           </p:cNvPr>
@@ -2821,7 +2821,7 @@
           <p:cNvPr id="3" name="Text Placeholder 2">
             <a:extLst>
               <a:ext uri="{FF2B5EF4-FFF2-40B4-BE49-F238E27FC236}">
-                <a16:creationId xmlns:a16="http://schemas.microsoft.com/office/drawing/2014/main" id="{818B2132-360C-D00B-61A2-CAE9F8D1074C}"/>
+                <a16:creationId xmlns:a16="http://schemas.microsoft.com/office/drawing/2014/main" id="{488098B1-26FA-40CF-DF8A-B1934184D767}"/>
               </a:ext>
             </a:extLst>
           </p:cNvPr>
@@ -2889,7 +2889,7 @@
           <p:cNvPr id="4" name="Date Placeholder 3">
             <a:extLst>
               <a:ext uri="{FF2B5EF4-FFF2-40B4-BE49-F238E27FC236}">
-                <a16:creationId xmlns:a16="http://schemas.microsoft.com/office/drawing/2014/main" id="{5DD22E78-0275-D89A-ADAE-5EC3F522641A}"/>
+                <a16:creationId xmlns:a16="http://schemas.microsoft.com/office/drawing/2014/main" id="{B3027352-398D-FC62-9B7A-BDF5E7D4B6FC}"/>
               </a:ext>
             </a:extLst>
           </p:cNvPr>
@@ -2923,9 +2923,9 @@
             </a:lvl1pPr>
           </a:lstStyle>
           <a:p>
-            <a:fld id="{D7BF77C4-1D67-4110-AA8D-11E51ED4D64C}" type="datetimeFigureOut">
+            <a:fld id="{E41E57C9-2898-4A86-BD65-A6AADA69DC43}" type="datetimeFigureOut">
               <a:rPr lang="id-ID" smtClean="0"/>
-              <a:t>26/06/2026</a:t>
+              <a:t>27/06/2026</a:t>
             </a:fld>
             <a:endParaRPr lang="id-ID"/>
           </a:p>
@@ -2936,7 +2936,7 @@
           <p:cNvPr id="5" name="Footer Placeholder 4">
             <a:extLst>
               <a:ext uri="{FF2B5EF4-FFF2-40B4-BE49-F238E27FC236}">
-                <a16:creationId xmlns:a16="http://schemas.microsoft.com/office/drawing/2014/main" id="{03381F07-CB7B-FE51-EEC5-08E08B9247C6}"/>
+                <a16:creationId xmlns:a16="http://schemas.microsoft.com/office/drawing/2014/main" id="{1F5DC441-A2CA-6BBB-7DC7-ECDA5EC8ABF2}"/>
               </a:ext>
             </a:extLst>
           </p:cNvPr>
@@ -2979,7 +2979,7 @@
           <p:cNvPr id="6" name="Slide Number Placeholder 5">
             <a:extLst>
               <a:ext uri="{FF2B5EF4-FFF2-40B4-BE49-F238E27FC236}">
-                <a16:creationId xmlns:a16="http://schemas.microsoft.com/office/drawing/2014/main" id="{77EF01D9-BAFA-1FE1-2B71-0A54C841AA5C}"/>
+                <a16:creationId xmlns:a16="http://schemas.microsoft.com/office/drawing/2014/main" id="{35A4EF28-21FE-169B-AF57-79138FF6EFC0}"/>
               </a:ext>
             </a:extLst>
           </p:cNvPr>
@@ -3013,7 +3013,7 @@
             </a:lvl1pPr>
           </a:lstStyle>
           <a:p>
-            <a:fld id="{E7818D08-E1D4-4ED2-B1A5-3F9D52E030B6}" type="slidenum">
+            <a:fld id="{F08BCEDC-FE0E-414F-8D37-A32F8FC22AC3}" type="slidenum">
               <a:rPr lang="id-ID" smtClean="0"/>
               <a:t>‹#›</a:t>
             </a:fld>
@@ -3024,7 +3024,7 @@
     </p:spTree>
     <p:extLst>
       <p:ext uri="{BB962C8B-B14F-4D97-AF65-F5344CB8AC3E}">
-        <p14:creationId xmlns:p14="http://schemas.microsoft.com/office/powerpoint/2010/main" val="365285014"/>
+        <p14:creationId xmlns:p14="http://schemas.microsoft.com/office/powerpoint/2010/main" val="850864326"/>
       </p:ext>
     </p:extLst>
   </p:cSld>
@@ -3347,7 +3347,7 @@
           <p:cNvPr id="4" name="Title 3">
             <a:extLst>
               <a:ext uri="{FF2B5EF4-FFF2-40B4-BE49-F238E27FC236}">
-                <a16:creationId xmlns:a16="http://schemas.microsoft.com/office/drawing/2014/main" id="{3428D05B-A0B5-7B45-88A4-AC7BB841D831}"/>
+                <a16:creationId xmlns:a16="http://schemas.microsoft.com/office/drawing/2014/main" id="{AB1A17C7-E033-6677-1B39-777C65B7D3A1}"/>
               </a:ext>
             </a:extLst>
           </p:cNvPr>
@@ -3359,71 +3359,38 @@
           </p:nvPr>
         </p:nvSpPr>
         <p:spPr/>
-        <p:txBody>
-          <a:bodyPr/>
-          <a:lstStyle/>
-          <a:p>
-            <a:pPr algn="ctr"/>
-            <a:r>
-              <a:rPr lang="id-ID" b="1" dirty="0"/>
-              <a:t>Proses Bisnis — Animasi</a:t>
-            </a:r>
-          </a:p>
-        </p:txBody>
-      </p:sp>
-      <p:sp>
-        <p:nvSpPr>
-          <p:cNvPr id="5" name="Rectangle: Rounded Corners 4">
-            <a:extLst>
-              <a:ext uri="{FF2B5EF4-FFF2-40B4-BE49-F238E27FC236}">
-                <a16:creationId xmlns:a16="http://schemas.microsoft.com/office/drawing/2014/main" id="{9DD2F27C-F125-88DA-765E-25C4B3D08827}"/>
-              </a:ext>
-            </a:extLst>
-          </p:cNvPr>
-          <p:cNvSpPr/>
-          <p:nvPr/>
-        </p:nvSpPr>
-        <p:spPr>
-          <a:xfrm>
-            <a:off x="838200" y="2998033"/>
-            <a:ext cx="2099872" cy="644577"/>
-          </a:xfrm>
-          <a:prstGeom prst="roundRect">
-            <a:avLst/>
-          </a:prstGeom>
-        </p:spPr>
         <p:style>
-          <a:lnRef idx="0">
-            <a:schemeClr val="accent5"/>
+          <a:lnRef idx="3">
+            <a:schemeClr val="lt1"/>
           </a:lnRef>
-          <a:fillRef idx="3">
-            <a:schemeClr val="accent5"/>
+          <a:fillRef idx="1">
+            <a:schemeClr val="accent2"/>
           </a:fillRef>
-          <a:effectRef idx="3">
-            <a:schemeClr val="accent5"/>
+          <a:effectRef idx="1">
+            <a:schemeClr val="accent2"/>
           </a:effectRef>
           <a:fontRef idx="minor">
             <a:schemeClr val="lt1"/>
           </a:fontRef>
         </p:style>
         <p:txBody>
-          <a:bodyPr rtlCol="0" anchor="ctr"/>
+          <a:bodyPr/>
           <a:lstStyle/>
           <a:p>
             <a:pPr algn="ctr"/>
             <a:r>
-              <a:rPr lang="id-ID" dirty="0"/>
-              <a:t>Prospek</a:t>
-            </a:r>
-          </a:p>
-        </p:txBody>
-      </p:sp>
-      <p:sp>
-        <p:nvSpPr>
-          <p:cNvPr id="6" name="Rectangle: Rounded Corners 5">
-            <a:extLst>
-              <a:ext uri="{FF2B5EF4-FFF2-40B4-BE49-F238E27FC236}">
-                <a16:creationId xmlns:a16="http://schemas.microsoft.com/office/drawing/2014/main" id="{8403717C-8B70-96B1-B725-54975965B02E}"/>
+              <a:rPr lang="id-ID" b="1" dirty="0"/>
+              <a:t>Proses Bisnis — Animasi</a:t>
+            </a:r>
+          </a:p>
+        </p:txBody>
+      </p:sp>
+      <p:sp>
+        <p:nvSpPr>
+          <p:cNvPr id="5" name="Rectangle: Rounded Corners 4">
+            <a:extLst>
+              <a:ext uri="{FF2B5EF4-FFF2-40B4-BE49-F238E27FC236}">
+                <a16:creationId xmlns:a16="http://schemas.microsoft.com/office/drawing/2014/main" id="{BD7B65DE-6CF6-F8E8-2155-71D0AEFC51B6}"/>
               </a:ext>
             </a:extLst>
           </p:cNvPr>
@@ -3432,22 +3399,48 @@
         </p:nvSpPr>
         <p:spPr>
           <a:xfrm>
-            <a:off x="3581400" y="2998033"/>
-            <a:ext cx="2099872" cy="644577"/>
+            <a:off x="944380" y="2994285"/>
+            <a:ext cx="1933731" cy="869430"/>
           </a:xfrm>
           <a:prstGeom prst="roundRect">
             <a:avLst/>
           </a:prstGeom>
+          <a:gradFill flip="none" rotWithShape="1">
+            <a:gsLst>
+              <a:gs pos="0">
+                <a:schemeClr val="accent5">
+                  <a:lumMod val="67000"/>
+                </a:schemeClr>
+              </a:gs>
+              <a:gs pos="48000">
+                <a:schemeClr val="accent5">
+                  <a:lumMod val="97000"/>
+                  <a:lumOff val="3000"/>
+                </a:schemeClr>
+              </a:gs>
+              <a:gs pos="100000">
+                <a:schemeClr val="accent5">
+                  <a:lumMod val="60000"/>
+                  <a:lumOff val="40000"/>
+                </a:schemeClr>
+              </a:gs>
+            </a:gsLst>
+            <a:lin ang="16200000" scaled="1"/>
+            <a:tileRect/>
+          </a:gradFill>
+          <a:ln>
+            <a:noFill/>
+          </a:ln>
         </p:spPr>
         <p:style>
           <a:lnRef idx="0">
-            <a:schemeClr val="accent5"/>
+            <a:scrgbClr r="0" g="0" b="0"/>
           </a:lnRef>
-          <a:fillRef idx="3">
-            <a:schemeClr val="accent5"/>
+          <a:fillRef idx="0">
+            <a:scrgbClr r="0" g="0" b="0"/>
           </a:fillRef>
-          <a:effectRef idx="3">
-            <a:schemeClr val="accent5"/>
+          <a:effectRef idx="0">
+            <a:scrgbClr r="0" g="0" b="0"/>
           </a:effectRef>
           <a:fontRef idx="minor">
             <a:schemeClr val="lt1"/>
@@ -3459,9 +3452,10 @@
           <a:p>
             <a:pPr algn="ctr"/>
             <a:r>
-              <a:rPr lang="id-ID" dirty="0"/>
-              <a:t>Penawaran</a:t>
-            </a:r>
+              <a:rPr lang="id-ID" b="1" dirty="0"/>
+              <a:t>PROSPEK</a:t>
+            </a:r>
+            <a:endParaRPr lang="id-ID" dirty="0"/>
           </a:p>
         </p:txBody>
       </p:sp>
@@ -3470,7 +3464,7 @@
           <p:cNvPr id="7" name="Rectangle: Rounded Corners 6">
             <a:extLst>
               <a:ext uri="{FF2B5EF4-FFF2-40B4-BE49-F238E27FC236}">
-                <a16:creationId xmlns:a16="http://schemas.microsoft.com/office/drawing/2014/main" id="{350F200D-7025-DCAC-B483-479C7918BF2B}"/>
+                <a16:creationId xmlns:a16="http://schemas.microsoft.com/office/drawing/2014/main" id="{BB1595FB-DCA0-72E8-C51D-8876F756797B}"/>
               </a:ext>
             </a:extLst>
           </p:cNvPr>
@@ -3479,22 +3473,48 @@
         </p:nvSpPr>
         <p:spPr>
           <a:xfrm>
-            <a:off x="6324600" y="2998033"/>
-            <a:ext cx="2099872" cy="644577"/>
+            <a:off x="6096000" y="2994285"/>
+            <a:ext cx="1933731" cy="869430"/>
           </a:xfrm>
           <a:prstGeom prst="roundRect">
             <a:avLst/>
           </a:prstGeom>
+          <a:gradFill flip="none" rotWithShape="1">
+            <a:gsLst>
+              <a:gs pos="0">
+                <a:schemeClr val="accent5">
+                  <a:lumMod val="67000"/>
+                </a:schemeClr>
+              </a:gs>
+              <a:gs pos="48000">
+                <a:schemeClr val="accent5">
+                  <a:lumMod val="97000"/>
+                  <a:lumOff val="3000"/>
+                </a:schemeClr>
+              </a:gs>
+              <a:gs pos="100000">
+                <a:schemeClr val="accent5">
+                  <a:lumMod val="60000"/>
+                  <a:lumOff val="40000"/>
+                </a:schemeClr>
+              </a:gs>
+            </a:gsLst>
+            <a:lin ang="16200000" scaled="1"/>
+            <a:tileRect/>
+          </a:gradFill>
+          <a:ln>
+            <a:noFill/>
+          </a:ln>
         </p:spPr>
         <p:style>
           <a:lnRef idx="0">
-            <a:schemeClr val="accent5"/>
+            <a:scrgbClr r="0" g="0" b="0"/>
           </a:lnRef>
-          <a:fillRef idx="3">
-            <a:schemeClr val="accent5"/>
+          <a:fillRef idx="0">
+            <a:scrgbClr r="0" g="0" b="0"/>
           </a:fillRef>
-          <a:effectRef idx="3">
-            <a:schemeClr val="accent5"/>
+          <a:effectRef idx="0">
+            <a:scrgbClr r="0" g="0" b="0"/>
           </a:effectRef>
           <a:fontRef idx="minor">
             <a:schemeClr val="lt1"/>
@@ -3506,9 +3526,10 @@
           <a:p>
             <a:pPr algn="ctr"/>
             <a:r>
-              <a:rPr lang="id-ID" dirty="0"/>
-              <a:t>Negosiasi</a:t>
-            </a:r>
+              <a:rPr lang="id-ID" b="1" dirty="0"/>
+              <a:t>NEGOSIASI</a:t>
+            </a:r>
+            <a:endParaRPr lang="id-ID" dirty="0"/>
           </a:p>
         </p:txBody>
       </p:sp>
@@ -3517,7 +3538,7 @@
           <p:cNvPr id="8" name="Rectangle: Rounded Corners 7">
             <a:extLst>
               <a:ext uri="{FF2B5EF4-FFF2-40B4-BE49-F238E27FC236}">
-                <a16:creationId xmlns:a16="http://schemas.microsoft.com/office/drawing/2014/main" id="{174717D6-ABAF-EA51-1638-FB422D5E3ED4}"/>
+                <a16:creationId xmlns:a16="http://schemas.microsoft.com/office/drawing/2014/main" id="{A300D7AB-0864-E55C-96A1-DF8F0302677B}"/>
               </a:ext>
             </a:extLst>
           </p:cNvPr>
@@ -3526,22 +3547,48 @@
         </p:nvSpPr>
         <p:spPr>
           <a:xfrm>
-            <a:off x="9067800" y="3039256"/>
-            <a:ext cx="2099872" cy="644577"/>
+            <a:off x="3520190" y="2994285"/>
+            <a:ext cx="1933731" cy="869430"/>
           </a:xfrm>
           <a:prstGeom prst="roundRect">
             <a:avLst/>
           </a:prstGeom>
+          <a:gradFill flip="none" rotWithShape="1">
+            <a:gsLst>
+              <a:gs pos="0">
+                <a:schemeClr val="accent5">
+                  <a:lumMod val="67000"/>
+                </a:schemeClr>
+              </a:gs>
+              <a:gs pos="48000">
+                <a:schemeClr val="accent5">
+                  <a:lumMod val="97000"/>
+                  <a:lumOff val="3000"/>
+                </a:schemeClr>
+              </a:gs>
+              <a:gs pos="100000">
+                <a:schemeClr val="accent5">
+                  <a:lumMod val="60000"/>
+                  <a:lumOff val="40000"/>
+                </a:schemeClr>
+              </a:gs>
+            </a:gsLst>
+            <a:lin ang="16200000" scaled="1"/>
+            <a:tileRect/>
+          </a:gradFill>
+          <a:ln>
+            <a:noFill/>
+          </a:ln>
         </p:spPr>
         <p:style>
           <a:lnRef idx="0">
-            <a:schemeClr val="accent5"/>
+            <a:scrgbClr r="0" g="0" b="0"/>
           </a:lnRef>
-          <a:fillRef idx="3">
-            <a:schemeClr val="accent5"/>
+          <a:fillRef idx="0">
+            <a:scrgbClr r="0" g="0" b="0"/>
           </a:fillRef>
-          <a:effectRef idx="3">
-            <a:schemeClr val="accent5"/>
+          <a:effectRef idx="0">
+            <a:scrgbClr r="0" g="0" b="0"/>
           </a:effectRef>
           <a:fontRef idx="minor">
             <a:schemeClr val="lt1"/>
@@ -3553,18 +3600,19 @@
           <a:p>
             <a:pPr algn="ctr"/>
             <a:r>
-              <a:rPr lang="id-ID" dirty="0"/>
-              <a:t>Deal</a:t>
-            </a:r>
-          </a:p>
-        </p:txBody>
-      </p:sp>
-      <p:sp>
-        <p:nvSpPr>
-          <p:cNvPr id="9" name="Arrow: Right 8">
-            <a:extLst>
-              <a:ext uri="{FF2B5EF4-FFF2-40B4-BE49-F238E27FC236}">
-                <a16:creationId xmlns:a16="http://schemas.microsoft.com/office/drawing/2014/main" id="{58C0E530-5645-A80F-47AA-C059BFFF0D5B}"/>
+              <a:rPr lang="id-ID" b="1" dirty="0"/>
+              <a:t>PENAWARAN</a:t>
+            </a:r>
+            <a:endParaRPr lang="id-ID" dirty="0"/>
+          </a:p>
+        </p:txBody>
+      </p:sp>
+      <p:sp>
+        <p:nvSpPr>
+          <p:cNvPr id="9" name="Rectangle: Rounded Corners 8">
+            <a:extLst>
+              <a:ext uri="{FF2B5EF4-FFF2-40B4-BE49-F238E27FC236}">
+                <a16:creationId xmlns:a16="http://schemas.microsoft.com/office/drawing/2014/main" id="{A4646BCC-7F30-A9CE-5E96-3426BBD76DEB}"/>
               </a:ext>
             </a:extLst>
           </p:cNvPr>
@@ -3573,8 +3621,82 @@
         </p:nvSpPr>
         <p:spPr>
           <a:xfrm>
-            <a:off x="3079854" y="3084226"/>
-            <a:ext cx="359764" cy="472190"/>
+            <a:off x="8671810" y="2994285"/>
+            <a:ext cx="1933731" cy="869430"/>
+          </a:xfrm>
+          <a:prstGeom prst="roundRect">
+            <a:avLst/>
+          </a:prstGeom>
+          <a:gradFill flip="none" rotWithShape="1">
+            <a:gsLst>
+              <a:gs pos="0">
+                <a:schemeClr val="accent5">
+                  <a:lumMod val="67000"/>
+                </a:schemeClr>
+              </a:gs>
+              <a:gs pos="48000">
+                <a:schemeClr val="accent5">
+                  <a:lumMod val="97000"/>
+                  <a:lumOff val="3000"/>
+                </a:schemeClr>
+              </a:gs>
+              <a:gs pos="100000">
+                <a:schemeClr val="accent5">
+                  <a:lumMod val="60000"/>
+                  <a:lumOff val="40000"/>
+                </a:schemeClr>
+              </a:gs>
+            </a:gsLst>
+            <a:lin ang="16200000" scaled="1"/>
+            <a:tileRect/>
+          </a:gradFill>
+          <a:ln>
+            <a:noFill/>
+          </a:ln>
+        </p:spPr>
+        <p:style>
+          <a:lnRef idx="0">
+            <a:scrgbClr r="0" g="0" b="0"/>
+          </a:lnRef>
+          <a:fillRef idx="0">
+            <a:scrgbClr r="0" g="0" b="0"/>
+          </a:fillRef>
+          <a:effectRef idx="0">
+            <a:scrgbClr r="0" g="0" b="0"/>
+          </a:effectRef>
+          <a:fontRef idx="minor">
+            <a:schemeClr val="lt1"/>
+          </a:fontRef>
+        </p:style>
+        <p:txBody>
+          <a:bodyPr rtlCol="0" anchor="ctr"/>
+          <a:lstStyle/>
+          <a:p>
+            <a:pPr algn="ctr"/>
+            <a:r>
+              <a:rPr lang="id-ID" b="1" dirty="0"/>
+              <a:t>DEAL</a:t>
+            </a:r>
+            <a:endParaRPr lang="id-ID" dirty="0"/>
+          </a:p>
+        </p:txBody>
+      </p:sp>
+      <p:sp>
+        <p:nvSpPr>
+          <p:cNvPr id="10" name="Arrow: Right 9">
+            <a:extLst>
+              <a:ext uri="{FF2B5EF4-FFF2-40B4-BE49-F238E27FC236}">
+                <a16:creationId xmlns:a16="http://schemas.microsoft.com/office/drawing/2014/main" id="{FE939FE7-9EE1-CD09-18DB-047FC1B965BF}"/>
+              </a:ext>
+            </a:extLst>
+          </p:cNvPr>
+          <p:cNvSpPr/>
+          <p:nvPr/>
+        </p:nvSpPr>
+        <p:spPr>
+          <a:xfrm>
+            <a:off x="2996783" y="3101090"/>
+            <a:ext cx="404734" cy="655820"/>
           </a:xfrm>
           <a:prstGeom prst="rightArrow">
             <a:avLst/>
@@ -3607,10 +3729,10 @@
       </p:sp>
       <p:sp>
         <p:nvSpPr>
-          <p:cNvPr id="10" name="Arrow: Right 9">
-            <a:extLst>
-              <a:ext uri="{FF2B5EF4-FFF2-40B4-BE49-F238E27FC236}">
-                <a16:creationId xmlns:a16="http://schemas.microsoft.com/office/drawing/2014/main" id="{55E90EB1-2C7E-C8FC-9684-A22C61A3F81C}"/>
+          <p:cNvPr id="11" name="Arrow: Right 10">
+            <a:extLst>
+              <a:ext uri="{FF2B5EF4-FFF2-40B4-BE49-F238E27FC236}">
+                <a16:creationId xmlns:a16="http://schemas.microsoft.com/office/drawing/2014/main" id="{E7A6F09F-B4CE-F673-5FC7-FD24606862B2}"/>
               </a:ext>
             </a:extLst>
           </p:cNvPr>
@@ -3619,8 +3741,8 @@
         </p:nvSpPr>
         <p:spPr>
           <a:xfrm>
-            <a:off x="5823054" y="3084226"/>
-            <a:ext cx="359764" cy="472190"/>
+            <a:off x="5572593" y="3082352"/>
+            <a:ext cx="404734" cy="655820"/>
           </a:xfrm>
           <a:prstGeom prst="rightArrow">
             <a:avLst/>
@@ -3653,10 +3775,10 @@
       </p:sp>
       <p:sp>
         <p:nvSpPr>
-          <p:cNvPr id="11" name="Arrow: Right 10">
-            <a:extLst>
-              <a:ext uri="{FF2B5EF4-FFF2-40B4-BE49-F238E27FC236}">
-                <a16:creationId xmlns:a16="http://schemas.microsoft.com/office/drawing/2014/main" id="{44BF4019-098F-7FC7-2BEB-0F126F808642}"/>
+          <p:cNvPr id="12" name="Arrow: Right 11">
+            <a:extLst>
+              <a:ext uri="{FF2B5EF4-FFF2-40B4-BE49-F238E27FC236}">
+                <a16:creationId xmlns:a16="http://schemas.microsoft.com/office/drawing/2014/main" id="{C77AD3B0-470A-9780-D86B-212E10564729}"/>
               </a:ext>
             </a:extLst>
           </p:cNvPr>
@@ -3665,8 +3787,8 @@
         </p:nvSpPr>
         <p:spPr>
           <a:xfrm>
-            <a:off x="8566254" y="3084226"/>
-            <a:ext cx="359764" cy="472190"/>
+            <a:off x="8148403" y="3082352"/>
+            <a:ext cx="404734" cy="655820"/>
           </a:xfrm>
           <a:prstGeom prst="rightArrow">
             <a:avLst/>
@@ -3700,7 +3822,7 @@
     </p:spTree>
     <p:extLst>
       <p:ext uri="{BB962C8B-B14F-4D97-AF65-F5344CB8AC3E}">
-        <p14:creationId xmlns:p14="http://schemas.microsoft.com/office/powerpoint/2010/main" val="1732875506"/>
+        <p14:creationId xmlns:p14="http://schemas.microsoft.com/office/powerpoint/2010/main" val="993206609"/>
       </p:ext>
     </p:extLst>
   </p:cSld>
@@ -3785,7 +3907,7 @@
                                           </p:stCondLst>
                                         </p:cTn>
                                         <p:tgtEl>
-                                          <p:spTgt spid="9"/>
+                                          <p:spTgt spid="10"/>
                                         </p:tgtEl>
                                         <p:attrNameLst>
                                           <p:attrName>style.visibility</p:attrName>
@@ -3799,7 +3921,7 @@
                                       <p:cBhvr>
                                         <p:cTn id="11" dur="500"/>
                                         <p:tgtEl>
-                                          <p:spTgt spid="9"/>
+                                          <p:spTgt spid="10"/>
                                         </p:tgtEl>
                                       </p:cBhvr>
                                     </p:animEffect>
@@ -3820,7 +3942,7 @@
                                           </p:stCondLst>
                                         </p:cTn>
                                         <p:tgtEl>
-                                          <p:spTgt spid="6"/>
+                                          <p:spTgt spid="8"/>
                                         </p:tgtEl>
                                         <p:attrNameLst>
                                           <p:attrName>style.visibility</p:attrName>
@@ -3834,7 +3956,7 @@
                                       <p:cBhvr>
                                         <p:cTn id="14" dur="500"/>
                                         <p:tgtEl>
-                                          <p:spTgt spid="6"/>
+                                          <p:spTgt spid="8"/>
                                         </p:tgtEl>
                                       </p:cBhvr>
                                     </p:animEffect>
@@ -3864,7 +3986,7 @@
                                           </p:stCondLst>
                                         </p:cTn>
                                         <p:tgtEl>
-                                          <p:spTgt spid="10"/>
+                                          <p:spTgt spid="11"/>
                                         </p:tgtEl>
                                         <p:attrNameLst>
                                           <p:attrName>style.visibility</p:attrName>
@@ -3878,7 +4000,7 @@
                                       <p:cBhvr>
                                         <p:cTn id="18" dur="500"/>
                                         <p:tgtEl>
-                                          <p:spTgt spid="10"/>
+                                          <p:spTgt spid="11"/>
                                         </p:tgtEl>
                                       </p:cBhvr>
                                     </p:animEffect>
@@ -3943,7 +4065,7 @@
                                           </p:stCondLst>
                                         </p:cTn>
                                         <p:tgtEl>
-                                          <p:spTgt spid="11"/>
+                                          <p:spTgt spid="12"/>
                                         </p:tgtEl>
                                         <p:attrNameLst>
                                           <p:attrName>style.visibility</p:attrName>
@@ -3957,7 +4079,7 @@
                                       <p:cBhvr>
                                         <p:cTn id="25" dur="500"/>
                                         <p:tgtEl>
-                                          <p:spTgt spid="11"/>
+                                          <p:spTgt spid="12"/>
                                         </p:tgtEl>
                                       </p:cBhvr>
                                     </p:animEffect>
@@ -3978,7 +4100,7 @@
                                           </p:stCondLst>
                                         </p:cTn>
                                         <p:tgtEl>
-                                          <p:spTgt spid="8"/>
+                                          <p:spTgt spid="9"/>
                                         </p:tgtEl>
                                         <p:attrNameLst>
                                           <p:attrName>style.visibility</p:attrName>
@@ -3990,9 +4112,9 @@
                                     </p:set>
                                     <p:animEffect transition="in" filter="fade">
                                       <p:cBhvr>
-                                        <p:cTn id="28" dur="1000"/>
+                                        <p:cTn id="28" dur="500"/>
                                         <p:tgtEl>
-                                          <p:spTgt spid="8"/>
+                                          <p:spTgt spid="9"/>
                                         </p:tgtEl>
                                       </p:cBhvr>
                                     </p:animEffect>
@@ -4009,7 +4131,7 @@
                                       <p:cBhvr>
                                         <p:cTn id="30" dur="1000" fill="hold"/>
                                         <p:tgtEl>
-                                          <p:spTgt spid="8"/>
+                                          <p:spTgt spid="9"/>
                                         </p:tgtEl>
                                       </p:cBhvr>
                                       <p:by x="150000" y="150000"/>
@@ -4023,7 +4145,7 @@
                                     <p:cond delay="0"/>
                                   </p:stCondLst>
                                   <p:childTnLst>
-                                    <p:animMotion origin="layout" path="M 0.00013 0.34398 L 4.16667E-6 -1.85185E-6 " pathEditMode="relative" rAng="0" ptsTypes="AA">
+                                    <p:animMotion origin="layout" path="M -8.33333E-7 0.25347 L 2.08333E-7 0 " pathEditMode="relative" rAng="0" ptsTypes="AA">
                                       <p:cBhvr>
                                         <p:cTn id="32" dur="2000" fill="hold"/>
                                         <p:tgtEl>
@@ -4034,7 +4156,7 @@
                                           <p:attrName>ppt_y</p:attrName>
                                         </p:attrNameLst>
                                       </p:cBhvr>
-                                      <p:rCtr x="-65" y="-17269"/>
+                                      <p:rCtr x="-39" y="-12685"/>
                                     </p:animMotion>
                                   </p:childTnLst>
                                 </p:cTn>
@@ -4069,13 +4191,13 @@
     <p:bldLst>
       <p:bldP spid="5" grpId="0" animBg="1"/>
       <p:bldP spid="5" grpId="1" animBg="1"/>
-      <p:bldP spid="6" grpId="0" animBg="1"/>
       <p:bldP spid="7" grpId="0" animBg="1"/>
       <p:bldP spid="8" grpId="0" animBg="1"/>
-      <p:bldP spid="8" grpId="1" animBg="1"/>
       <p:bldP spid="9" grpId="0" animBg="1"/>
+      <p:bldP spid="9" grpId="1" animBg="1"/>
       <p:bldP spid="10" grpId="0" animBg="1"/>
       <p:bldP spid="11" grpId="0" animBg="1"/>
+      <p:bldP spid="12" grpId="0" animBg="1"/>
     </p:bldLst>
   </p:timing>
 </p:sld>

--- a/assets/files/animasi-proses-bisnis.pptx
+++ b/assets/files/animasi-proses-bisnis.pptx
@@ -5,7 +5,7 @@
     <p:sldMasterId id="2147483648" r:id="rId1"/>
   </p:sldMasterIdLst>
   <p:sldIdLst>
-    <p:sldId id="256" r:id="rId2"/>
+    <p:sldId id="257" r:id="rId2"/>
   </p:sldIdLst>
   <p:sldSz cx="12192000" cy="6858000"/>
   <p:notesSz cx="6858000" cy="9144000"/>
@@ -104,6 +104,11 @@
       </a:defRPr>
     </a:lvl9pPr>
   </p:defaultTextStyle>
+  <p:extLst>
+    <p:ext uri="{EFAFB233-063F-42B5-8137-9DF3F51BA10A}">
+      <p15:sldGuideLst xmlns:p15="http://schemas.microsoft.com/office/powerpoint/2012/main"/>
+    </p:ext>
+  </p:extLst>
 </p:presentation>
 </file>
 
@@ -256,7 +261,7 @@
           <a:p>
             <a:fld id="{E41E57C9-2898-4A86-BD65-A6AADA69DC43}" type="datetimeFigureOut">
               <a:rPr lang="id-ID" smtClean="0"/>
-              <a:t>27/06/2026</a:t>
+              <a:t>07/07/2026</a:t>
             </a:fld>
             <a:endParaRPr lang="id-ID"/>
           </a:p>
@@ -456,7 +461,7 @@
           <a:p>
             <a:fld id="{E41E57C9-2898-4A86-BD65-A6AADA69DC43}" type="datetimeFigureOut">
               <a:rPr lang="id-ID" smtClean="0"/>
-              <a:t>27/06/2026</a:t>
+              <a:t>07/07/2026</a:t>
             </a:fld>
             <a:endParaRPr lang="id-ID"/>
           </a:p>
@@ -666,7 +671,7 @@
           <a:p>
             <a:fld id="{E41E57C9-2898-4A86-BD65-A6AADA69DC43}" type="datetimeFigureOut">
               <a:rPr lang="id-ID" smtClean="0"/>
-              <a:t>27/06/2026</a:t>
+              <a:t>07/07/2026</a:t>
             </a:fld>
             <a:endParaRPr lang="id-ID"/>
           </a:p>
@@ -866,7 +871,7 @@
           <a:p>
             <a:fld id="{E41E57C9-2898-4A86-BD65-A6AADA69DC43}" type="datetimeFigureOut">
               <a:rPr lang="id-ID" smtClean="0"/>
-              <a:t>27/06/2026</a:t>
+              <a:t>07/07/2026</a:t>
             </a:fld>
             <a:endParaRPr lang="id-ID"/>
           </a:p>
@@ -1142,7 +1147,7 @@
           <a:p>
             <a:fld id="{E41E57C9-2898-4A86-BD65-A6AADA69DC43}" type="datetimeFigureOut">
               <a:rPr lang="id-ID" smtClean="0"/>
-              <a:t>27/06/2026</a:t>
+              <a:t>07/07/2026</a:t>
             </a:fld>
             <a:endParaRPr lang="id-ID"/>
           </a:p>
@@ -1410,7 +1415,7 @@
           <a:p>
             <a:fld id="{E41E57C9-2898-4A86-BD65-A6AADA69DC43}" type="datetimeFigureOut">
               <a:rPr lang="id-ID" smtClean="0"/>
-              <a:t>27/06/2026</a:t>
+              <a:t>07/07/2026</a:t>
             </a:fld>
             <a:endParaRPr lang="id-ID"/>
           </a:p>
@@ -1825,7 +1830,7 @@
           <a:p>
             <a:fld id="{E41E57C9-2898-4A86-BD65-A6AADA69DC43}" type="datetimeFigureOut">
               <a:rPr lang="id-ID" smtClean="0"/>
-              <a:t>27/06/2026</a:t>
+              <a:t>07/07/2026</a:t>
             </a:fld>
             <a:endParaRPr lang="id-ID"/>
           </a:p>
@@ -1967,7 +1972,7 @@
           <a:p>
             <a:fld id="{E41E57C9-2898-4A86-BD65-A6AADA69DC43}" type="datetimeFigureOut">
               <a:rPr lang="id-ID" smtClean="0"/>
-              <a:t>27/06/2026</a:t>
+              <a:t>07/07/2026</a:t>
             </a:fld>
             <a:endParaRPr lang="id-ID"/>
           </a:p>
@@ -2080,7 +2085,7 @@
           <a:p>
             <a:fld id="{E41E57C9-2898-4A86-BD65-A6AADA69DC43}" type="datetimeFigureOut">
               <a:rPr lang="id-ID" smtClean="0"/>
-              <a:t>27/06/2026</a:t>
+              <a:t>07/07/2026</a:t>
             </a:fld>
             <a:endParaRPr lang="id-ID"/>
           </a:p>
@@ -2393,7 +2398,7 @@
           <a:p>
             <a:fld id="{E41E57C9-2898-4A86-BD65-A6AADA69DC43}" type="datetimeFigureOut">
               <a:rPr lang="id-ID" smtClean="0"/>
-              <a:t>27/06/2026</a:t>
+              <a:t>07/07/2026</a:t>
             </a:fld>
             <a:endParaRPr lang="id-ID"/>
           </a:p>
@@ -2682,7 +2687,7 @@
           <a:p>
             <a:fld id="{E41E57C9-2898-4A86-BD65-A6AADA69DC43}" type="datetimeFigureOut">
               <a:rPr lang="id-ID" smtClean="0"/>
-              <a:t>27/06/2026</a:t>
+              <a:t>07/07/2026</a:t>
             </a:fld>
             <a:endParaRPr lang="id-ID"/>
           </a:p>
@@ -2925,7 +2930,7 @@
           <a:p>
             <a:fld id="{E41E57C9-2898-4A86-BD65-A6AADA69DC43}" type="datetimeFigureOut">
               <a:rPr lang="id-ID" smtClean="0"/>
-              <a:t>27/06/2026</a:t>
+              <a:t>07/07/2026</a:t>
             </a:fld>
             <a:endParaRPr lang="id-ID"/>
           </a:p>
@@ -3330,7 +3335,13 @@
   <p:cSld>
     <p:spTree>
       <p:nvGrpSpPr>
-        <p:cNvPr id="1" name=""/>
+        <p:cNvPr id="1" name="">
+          <a:extLst>
+            <a:ext uri="{FF2B5EF4-FFF2-40B4-BE49-F238E27FC236}">
+              <a16:creationId xmlns:a16="http://schemas.microsoft.com/office/drawing/2014/main" id="{70EE38A4-229F-5773-C08B-4EED05001570}"/>
+            </a:ext>
+          </a:extLst>
+        </p:cNvPr>
         <p:cNvGrpSpPr/>
         <p:nvPr/>
       </p:nvGrpSpPr>
@@ -3347,7 +3358,7 @@
           <p:cNvPr id="4" name="Title 3">
             <a:extLst>
               <a:ext uri="{FF2B5EF4-FFF2-40B4-BE49-F238E27FC236}">
-                <a16:creationId xmlns:a16="http://schemas.microsoft.com/office/drawing/2014/main" id="{AB1A17C7-E033-6677-1B39-777C65B7D3A1}"/>
+                <a16:creationId xmlns:a16="http://schemas.microsoft.com/office/drawing/2014/main" id="{4076AA8A-B29B-BB25-8585-A857AF75BDE3}"/>
               </a:ext>
             </a:extLst>
           </p:cNvPr>
@@ -3358,16 +3369,43 @@
             <p:ph type="title"/>
           </p:nvPr>
         </p:nvSpPr>
-        <p:spPr/>
+        <p:spPr>
+          <a:gradFill flip="none" rotWithShape="1">
+            <a:gsLst>
+              <a:gs pos="0">
+                <a:schemeClr val="accent5">
+                  <a:lumMod val="67000"/>
+                </a:schemeClr>
+              </a:gs>
+              <a:gs pos="48000">
+                <a:schemeClr val="accent5">
+                  <a:lumMod val="97000"/>
+                  <a:lumOff val="3000"/>
+                </a:schemeClr>
+              </a:gs>
+              <a:gs pos="100000">
+                <a:schemeClr val="accent5">
+                  <a:lumMod val="60000"/>
+                  <a:lumOff val="40000"/>
+                </a:schemeClr>
+              </a:gs>
+            </a:gsLst>
+            <a:lin ang="16200000" scaled="1"/>
+            <a:tileRect/>
+          </a:gradFill>
+          <a:ln>
+            <a:noFill/>
+          </a:ln>
+        </p:spPr>
         <p:style>
-          <a:lnRef idx="3">
-            <a:schemeClr val="lt1"/>
+          <a:lnRef idx="0">
+            <a:scrgbClr r="0" g="0" b="0"/>
           </a:lnRef>
-          <a:fillRef idx="1">
-            <a:schemeClr val="accent2"/>
+          <a:fillRef idx="0">
+            <a:scrgbClr r="0" g="0" b="0"/>
           </a:fillRef>
-          <a:effectRef idx="1">
-            <a:schemeClr val="accent2"/>
+          <a:effectRef idx="0">
+            <a:scrgbClr r="0" g="0" b="0"/>
           </a:effectRef>
           <a:fontRef idx="minor">
             <a:schemeClr val="lt1"/>
@@ -3379,8 +3417,20 @@
           <a:p>
             <a:pPr algn="ctr"/>
             <a:r>
-              <a:rPr lang="id-ID" b="1" dirty="0"/>
-              <a:t>Proses Bisnis — Animasi</a:t>
+              <a:rPr lang="id-ID" b="1" spc="50" dirty="0">
+                <a:ln w="0"/>
+                <a:solidFill>
+                  <a:schemeClr val="bg2"/>
+                </a:solidFill>
+                <a:effectLst>
+                  <a:innerShdw blurRad="63500" dist="50800" dir="13500000">
+                    <a:srgbClr val="000000">
+                      <a:alpha val="50000"/>
+                    </a:srgbClr>
+                  </a:innerShdw>
+                </a:effectLst>
+              </a:rPr>
+              <a:t>Proses Bisnis Animasi</a:t>
             </a:r>
           </a:p>
         </p:txBody>
@@ -3390,7 +3440,7 @@
           <p:cNvPr id="5" name="Rectangle: Rounded Corners 4">
             <a:extLst>
               <a:ext uri="{FF2B5EF4-FFF2-40B4-BE49-F238E27FC236}">
-                <a16:creationId xmlns:a16="http://schemas.microsoft.com/office/drawing/2014/main" id="{BD7B65DE-6CF6-F8E8-2155-71D0AEFC51B6}"/>
+                <a16:creationId xmlns:a16="http://schemas.microsoft.com/office/drawing/2014/main" id="{A273981D-C267-C3EB-4B18-46620D9E324C}"/>
               </a:ext>
             </a:extLst>
           </p:cNvPr>
@@ -3399,7 +3449,7 @@
         </p:nvSpPr>
         <p:spPr>
           <a:xfrm>
-            <a:off x="944380" y="2994285"/>
+            <a:off x="-1933731" y="2998032"/>
             <a:ext cx="1933731" cy="869430"/>
           </a:xfrm>
           <a:prstGeom prst="roundRect">
@@ -3464,7 +3514,7 @@
           <p:cNvPr id="7" name="Rectangle: Rounded Corners 6">
             <a:extLst>
               <a:ext uri="{FF2B5EF4-FFF2-40B4-BE49-F238E27FC236}">
-                <a16:creationId xmlns:a16="http://schemas.microsoft.com/office/drawing/2014/main" id="{BB1595FB-DCA0-72E8-C51D-8876F756797B}"/>
+                <a16:creationId xmlns:a16="http://schemas.microsoft.com/office/drawing/2014/main" id="{EE8DE3FC-46E9-A644-E24A-ACBB809C1106}"/>
               </a:ext>
             </a:extLst>
           </p:cNvPr>
@@ -3473,7 +3523,7 @@
         </p:nvSpPr>
         <p:spPr>
           <a:xfrm>
-            <a:off x="6096000" y="2994285"/>
+            <a:off x="6488658" y="2998032"/>
             <a:ext cx="1933731" cy="869430"/>
           </a:xfrm>
           <a:prstGeom prst="roundRect">
@@ -3538,7 +3588,7 @@
           <p:cNvPr id="8" name="Rectangle: Rounded Corners 7">
             <a:extLst>
               <a:ext uri="{FF2B5EF4-FFF2-40B4-BE49-F238E27FC236}">
-                <a16:creationId xmlns:a16="http://schemas.microsoft.com/office/drawing/2014/main" id="{A300D7AB-0864-E55C-96A1-DF8F0302677B}"/>
+                <a16:creationId xmlns:a16="http://schemas.microsoft.com/office/drawing/2014/main" id="{2A9DD797-FDAF-E2AA-E5E1-392A3120B1F7}"/>
               </a:ext>
             </a:extLst>
           </p:cNvPr>
@@ -3547,7 +3597,7 @@
         </p:nvSpPr>
         <p:spPr>
           <a:xfrm>
-            <a:off x="3520190" y="2994285"/>
+            <a:off x="3663429" y="2998032"/>
             <a:ext cx="1933731" cy="869430"/>
           </a:xfrm>
           <a:prstGeom prst="roundRect">
@@ -3612,7 +3662,7 @@
           <p:cNvPr id="9" name="Rectangle: Rounded Corners 8">
             <a:extLst>
               <a:ext uri="{FF2B5EF4-FFF2-40B4-BE49-F238E27FC236}">
-                <a16:creationId xmlns:a16="http://schemas.microsoft.com/office/drawing/2014/main" id="{A4646BCC-7F30-A9CE-5E96-3426BBD76DEB}"/>
+                <a16:creationId xmlns:a16="http://schemas.microsoft.com/office/drawing/2014/main" id="{B4EAED2B-3038-4019-34C1-7FEE657B87A1}"/>
               </a:ext>
             </a:extLst>
           </p:cNvPr>
@@ -3621,7 +3671,7 @@
         </p:nvSpPr>
         <p:spPr>
           <a:xfrm>
-            <a:off x="8671810" y="2994285"/>
+            <a:off x="9313889" y="2998032"/>
             <a:ext cx="1933731" cy="869430"/>
           </a:xfrm>
           <a:prstGeom prst="roundRect">
@@ -3686,7 +3736,7 @@
           <p:cNvPr id="10" name="Arrow: Right 9">
             <a:extLst>
               <a:ext uri="{FF2B5EF4-FFF2-40B4-BE49-F238E27FC236}">
-                <a16:creationId xmlns:a16="http://schemas.microsoft.com/office/drawing/2014/main" id="{FE939FE7-9EE1-CD09-18DB-047FC1B965BF}"/>
+                <a16:creationId xmlns:a16="http://schemas.microsoft.com/office/drawing/2014/main" id="{FFAF2313-E296-E5E0-46BC-E0CA31EE06E8}"/>
               </a:ext>
             </a:extLst>
           </p:cNvPr>
@@ -3695,7 +3745,7 @@
         </p:nvSpPr>
         <p:spPr>
           <a:xfrm>
-            <a:off x="2996783" y="3101090"/>
+            <a:off x="3015313" y="3104837"/>
             <a:ext cx="404734" cy="655820"/>
           </a:xfrm>
           <a:prstGeom prst="rightArrow">
@@ -3732,7 +3782,7 @@
           <p:cNvPr id="11" name="Arrow: Right 10">
             <a:extLst>
               <a:ext uri="{FF2B5EF4-FFF2-40B4-BE49-F238E27FC236}">
-                <a16:creationId xmlns:a16="http://schemas.microsoft.com/office/drawing/2014/main" id="{E7A6F09F-B4CE-F673-5FC7-FD24606862B2}"/>
+                <a16:creationId xmlns:a16="http://schemas.microsoft.com/office/drawing/2014/main" id="{BB1BB413-63C3-9831-E788-E71EFF5AE899}"/>
               </a:ext>
             </a:extLst>
           </p:cNvPr>
@@ -3741,7 +3791,7 @@
         </p:nvSpPr>
         <p:spPr>
           <a:xfrm>
-            <a:off x="5572593" y="3082352"/>
+            <a:off x="5840542" y="3104837"/>
             <a:ext cx="404734" cy="655820"/>
           </a:xfrm>
           <a:prstGeom prst="rightArrow">
@@ -3778,7 +3828,7 @@
           <p:cNvPr id="12" name="Arrow: Right 11">
             <a:extLst>
               <a:ext uri="{FF2B5EF4-FFF2-40B4-BE49-F238E27FC236}">
-                <a16:creationId xmlns:a16="http://schemas.microsoft.com/office/drawing/2014/main" id="{C77AD3B0-470A-9780-D86B-212E10564729}"/>
+                <a16:creationId xmlns:a16="http://schemas.microsoft.com/office/drawing/2014/main" id="{5FA42955-E6C5-D876-5948-48242D66EFD4}"/>
               </a:ext>
             </a:extLst>
           </p:cNvPr>
@@ -3787,7 +3837,7 @@
         </p:nvSpPr>
         <p:spPr>
           <a:xfrm>
-            <a:off x="8148403" y="3082352"/>
+            <a:off x="8665771" y="3104837"/>
             <a:ext cx="404734" cy="655820"/>
           </a:xfrm>
           <a:prstGeom prst="rightArrow">
@@ -3822,7 +3872,7 @@
     </p:spTree>
     <p:extLst>
       <p:ext uri="{BB962C8B-B14F-4D97-AF65-F5344CB8AC3E}">
-        <p14:creationId xmlns:p14="http://schemas.microsoft.com/office/powerpoint/2010/main" val="993206609"/>
+        <p14:creationId xmlns:p14="http://schemas.microsoft.com/office/powerpoint/2010/main" val="3885955876"/>
       </p:ext>
     </p:extLst>
   </p:cSld>
@@ -3850,37 +3900,24 @@
                             </p:stCondLst>
                             <p:childTnLst>
                               <p:par>
-                                <p:cTn id="5" presetID="10" presetClass="entr" presetSubtype="0" fill="hold" grpId="0" nodeType="clickEffect">
+                                <p:cTn id="5" presetID="42" presetClass="path" presetSubtype="0" accel="50000" decel="50000" fill="hold" grpId="0" nodeType="clickEffect">
                                   <p:stCondLst>
                                     <p:cond delay="0"/>
                                   </p:stCondLst>
                                   <p:childTnLst>
-                                    <p:set>
+                                    <p:animMotion origin="layout" path="M -3.125E-6 -2.96296E-6 L 0.22305 -0.00046 " pathEditMode="relative" rAng="0" ptsTypes="AA">
                                       <p:cBhvr>
-                                        <p:cTn id="6" dur="1" fill="hold">
-                                          <p:stCondLst>
-                                            <p:cond delay="0"/>
-                                          </p:stCondLst>
-                                        </p:cTn>
+                                        <p:cTn id="6" dur="1000" fill="hold"/>
                                         <p:tgtEl>
                                           <p:spTgt spid="5"/>
                                         </p:tgtEl>
                                         <p:attrNameLst>
-                                          <p:attrName>style.visibility</p:attrName>
+                                          <p:attrName>ppt_x</p:attrName>
+                                          <p:attrName>ppt_y</p:attrName>
                                         </p:attrNameLst>
                                       </p:cBhvr>
-                                      <p:to>
-                                        <p:strVal val="visible"/>
-                                      </p:to>
-                                    </p:set>
-                                    <p:animEffect transition="in" filter="fade">
-                                      <p:cBhvr>
-                                        <p:cTn id="7" dur="500"/>
-                                        <p:tgtEl>
-                                          <p:spTgt spid="5"/>
-                                        </p:tgtEl>
-                                      </p:cBhvr>
-                                    </p:animEffect>
+                                      <p:rCtr x="11146" y="-23"/>
+                                    </p:animMotion>
                                   </p:childTnLst>
                                 </p:cTn>
                               </p:par>
@@ -3888,20 +3925,20 @@
                           </p:cTn>
                         </p:par>
                         <p:par>
-                          <p:cTn id="8" fill="hold">
+                          <p:cTn id="7" fill="hold">
                             <p:stCondLst>
-                              <p:cond delay="500"/>
+                              <p:cond delay="1000"/>
                             </p:stCondLst>
                             <p:childTnLst>
                               <p:par>
-                                <p:cTn id="9" presetID="10" presetClass="entr" presetSubtype="0" fill="hold" grpId="0" nodeType="afterEffect">
+                                <p:cTn id="8" presetID="10" presetClass="entr" presetSubtype="0" fill="hold" grpId="0" nodeType="afterEffect">
                                   <p:stCondLst>
                                     <p:cond delay="0"/>
                                   </p:stCondLst>
                                   <p:childTnLst>
                                     <p:set>
                                       <p:cBhvr>
-                                        <p:cTn id="10" dur="1" fill="hold">
+                                        <p:cTn id="9" dur="1" fill="hold">
                                           <p:stCondLst>
                                             <p:cond delay="0"/>
                                           </p:stCondLst>
@@ -3919,7 +3956,7 @@
                                     </p:set>
                                     <p:animEffect transition="in" filter="fade">
                                       <p:cBhvr>
-                                        <p:cTn id="11" dur="500"/>
+                                        <p:cTn id="10" dur="500"/>
                                         <p:tgtEl>
                                           <p:spTgt spid="10"/>
                                         </p:tgtEl>
@@ -3928,8 +3965,17 @@
                                   </p:childTnLst>
                                 </p:cTn>
                               </p:par>
+                            </p:childTnLst>
+                          </p:cTn>
+                        </p:par>
+                        <p:par>
+                          <p:cTn id="11" fill="hold">
+                            <p:stCondLst>
+                              <p:cond delay="1500"/>
+                            </p:stCondLst>
+                            <p:childTnLst>
                               <p:par>
-                                <p:cTn id="12" presetID="10" presetClass="entr" presetSubtype="0" fill="hold" grpId="0" nodeType="withEffect">
+                                <p:cTn id="12" presetID="10" presetClass="entr" presetSubtype="0" fill="hold" grpId="0" nodeType="afterEffect">
                                   <p:stCondLst>
                                     <p:cond delay="0"/>
                                   </p:stCondLst>
@@ -3969,7 +4015,7 @@
                         <p:par>
                           <p:cTn id="15" fill="hold">
                             <p:stCondLst>
-                              <p:cond delay="1000"/>
+                              <p:cond delay="2000"/>
                             </p:stCondLst>
                             <p:childTnLst>
                               <p:par>
@@ -4007,15 +4053,24 @@
                                   </p:childTnLst>
                                 </p:cTn>
                               </p:par>
+                            </p:childTnLst>
+                          </p:cTn>
+                        </p:par>
+                        <p:par>
+                          <p:cTn id="19" fill="hold">
+                            <p:stCondLst>
+                              <p:cond delay="2500"/>
+                            </p:stCondLst>
+                            <p:childTnLst>
                               <p:par>
-                                <p:cTn id="19" presetID="10" presetClass="entr" presetSubtype="0" fill="hold" grpId="0" nodeType="withEffect">
+                                <p:cTn id="20" presetID="10" presetClass="entr" presetSubtype="0" fill="hold" grpId="0" nodeType="afterEffect">
                                   <p:stCondLst>
                                     <p:cond delay="0"/>
                                   </p:stCondLst>
                                   <p:childTnLst>
                                     <p:set>
                                       <p:cBhvr>
-                                        <p:cTn id="20" dur="1" fill="hold">
+                                        <p:cTn id="21" dur="1" fill="hold">
                                           <p:stCondLst>
                                             <p:cond delay="0"/>
                                           </p:stCondLst>
@@ -4033,7 +4088,7 @@
                                     </p:set>
                                     <p:animEffect transition="in" filter="fade">
                                       <p:cBhvr>
-                                        <p:cTn id="21" dur="500"/>
+                                        <p:cTn id="22" dur="500"/>
                                         <p:tgtEl>
                                           <p:spTgt spid="7"/>
                                         </p:tgtEl>
@@ -4046,20 +4101,20 @@
                           </p:cTn>
                         </p:par>
                         <p:par>
-                          <p:cTn id="22" fill="hold">
+                          <p:cTn id="23" fill="hold">
                             <p:stCondLst>
-                              <p:cond delay="1500"/>
+                              <p:cond delay="3000"/>
                             </p:stCondLst>
                             <p:childTnLst>
                               <p:par>
-                                <p:cTn id="23" presetID="10" presetClass="entr" presetSubtype="0" fill="hold" grpId="0" nodeType="afterEffect">
+                                <p:cTn id="24" presetID="10" presetClass="entr" presetSubtype="0" fill="hold" grpId="0" nodeType="afterEffect">
                                   <p:stCondLst>
                                     <p:cond delay="0"/>
                                   </p:stCondLst>
                                   <p:childTnLst>
                                     <p:set>
                                       <p:cBhvr>
-                                        <p:cTn id="24" dur="1" fill="hold">
+                                        <p:cTn id="25" dur="1" fill="hold">
                                           <p:stCondLst>
                                             <p:cond delay="0"/>
                                           </p:stCondLst>
@@ -4077,7 +4132,7 @@
                                     </p:set>
                                     <p:animEffect transition="in" filter="fade">
                                       <p:cBhvr>
-                                        <p:cTn id="25" dur="500"/>
+                                        <p:cTn id="26" dur="500"/>
                                         <p:tgtEl>
                                           <p:spTgt spid="12"/>
                                         </p:tgtEl>
@@ -4086,15 +4141,24 @@
                                   </p:childTnLst>
                                 </p:cTn>
                               </p:par>
+                            </p:childTnLst>
+                          </p:cTn>
+                        </p:par>
+                        <p:par>
+                          <p:cTn id="27" fill="hold">
+                            <p:stCondLst>
+                              <p:cond delay="3500"/>
+                            </p:stCondLst>
+                            <p:childTnLst>
                               <p:par>
-                                <p:cTn id="26" presetID="10" presetClass="entr" presetSubtype="0" fill="hold" grpId="0" nodeType="withEffect">
+                                <p:cTn id="28" presetID="10" presetClass="entr" presetSubtype="0" fill="hold" grpId="0" nodeType="afterEffect">
                                   <p:stCondLst>
                                     <p:cond delay="0"/>
                                   </p:stCondLst>
                                   <p:childTnLst>
                                     <p:set>
                                       <p:cBhvr>
-                                        <p:cTn id="27" dur="1" fill="hold">
+                                        <p:cTn id="29" dur="1" fill="hold">
                                           <p:stCondLst>
                                             <p:cond delay="0"/>
                                           </p:stCondLst>
@@ -4112,7 +4176,7 @@
                                     </p:set>
                                     <p:animEffect transition="in" filter="fade">
                                       <p:cBhvr>
-                                        <p:cTn id="28" dur="500"/>
+                                        <p:cTn id="30" dur="500"/>
                                         <p:tgtEl>
                                           <p:spTgt spid="9"/>
                                         </p:tgtEl>
@@ -4122,42 +4186,20 @@
                                 </p:cTn>
                               </p:par>
                               <p:par>
-                                <p:cTn id="29" presetID="6" presetClass="emph" presetSubtype="0" autoRev="1" fill="hold" grpId="1" nodeType="withEffect">
+                                <p:cTn id="31" presetID="6" presetClass="emph" presetSubtype="0" autoRev="1" fill="hold" grpId="1" nodeType="withEffect">
                                   <p:stCondLst>
                                     <p:cond delay="0"/>
                                   </p:stCondLst>
                                   <p:childTnLst>
                                     <p:animScale>
                                       <p:cBhvr>
-                                        <p:cTn id="30" dur="1000" fill="hold"/>
+                                        <p:cTn id="32" dur="1000" fill="hold"/>
                                         <p:tgtEl>
                                           <p:spTgt spid="9"/>
                                         </p:tgtEl>
                                       </p:cBhvr>
                                       <p:by x="150000" y="150000"/>
                                     </p:animScale>
-                                  </p:childTnLst>
-                                </p:cTn>
-                              </p:par>
-                              <p:par>
-                                <p:cTn id="31" presetID="42" presetClass="path" presetSubtype="0" accel="50000" decel="50000" fill="hold" grpId="1" nodeType="withEffect">
-                                  <p:stCondLst>
-                                    <p:cond delay="0"/>
-                                  </p:stCondLst>
-                                  <p:childTnLst>
-                                    <p:animMotion origin="layout" path="M -8.33333E-7 0.25347 L 2.08333E-7 0 " pathEditMode="relative" rAng="0" ptsTypes="AA">
-                                      <p:cBhvr>
-                                        <p:cTn id="32" dur="2000" fill="hold"/>
-                                        <p:tgtEl>
-                                          <p:spTgt spid="5"/>
-                                        </p:tgtEl>
-                                        <p:attrNameLst>
-                                          <p:attrName>ppt_x</p:attrName>
-                                          <p:attrName>ppt_y</p:attrName>
-                                        </p:attrNameLst>
-                                      </p:cBhvr>
-                                      <p:rCtr x="-39" y="-12685"/>
-                                    </p:animMotion>
                                   </p:childTnLst>
                                 </p:cTn>
                               </p:par>
@@ -4190,7 +4232,6 @@
     </p:tnLst>
     <p:bldLst>
       <p:bldP spid="5" grpId="0" animBg="1"/>
-      <p:bldP spid="5" grpId="1" animBg="1"/>
       <p:bldP spid="7" grpId="0" animBg="1"/>
       <p:bldP spid="8" grpId="0" animBg="1"/>
       <p:bldP spid="9" grpId="0" animBg="1"/>
